--- a/docs/BJ검사기-Set-Up-완료보고서.pptx
+++ b/docs/BJ검사기-Set-Up-완료보고서.pptx
@@ -10,9 +10,10 @@
     <p:sldId id="258" r:id="rId4"/>
     <p:sldId id="259" r:id="rId5"/>
     <p:sldId id="260" r:id="rId6"/>
+    <p:sldId id="261" r:id="rId7"/>
   </p:sldIdLst>
   <p:notesMasterIdLst>
-    <p:notesMasterId r:id="rId7"/>
+    <p:notesMasterId r:id="rId8"/>
   </p:notesMasterIdLst>
   <p:sldSz cx="9144000" cy="6858000"/>
   <p:notesSz cx="6858000" cy="9144000"/>
@@ -900,6 +901,94 @@
 </p:notes>
 </file>
 
+<file path=ppt/notesSlides/notesSlide6.xml><?xml version="1.0" encoding="utf-8"?>
+<p:notes xmlns:a="http://schemas.openxmlformats.org/drawingml/2006/main" xmlns:r="http://schemas.openxmlformats.org/officeDocument/2006/relationships" xmlns:p="http://schemas.openxmlformats.org/presentationml/2006/main">
+  <p:cSld>
+    <p:spTree>
+      <p:nvGrpSpPr>
+        <p:cNvPr id="1" name=""/>
+        <p:cNvGrpSpPr/>
+        <p:nvPr/>
+      </p:nvGrpSpPr>
+      <p:grpSpPr>
+        <a:xfrm>
+          <a:off x="0" y="0"/>
+          <a:ext cx="0" cy="0"/>
+          <a:chOff x="0" y="0"/>
+          <a:chExt cx="0" cy="0"/>
+        </a:xfrm>
+      </p:grpSpPr>
+      <p:sp>
+        <p:nvSpPr>
+          <p:cNvPr id="2" name="Slide Image Placeholder 1"/>
+          <p:cNvSpPr>
+            <a:spLocks noGrp="1" noRot="1" noChangeAspect="1"/>
+          </p:cNvSpPr>
+          <p:nvPr>
+            <p:ph type="sldImg"/>
+          </p:nvPr>
+        </p:nvSpPr>
+        <p:spPr/>
+      </p:sp>
+      <p:sp>
+        <p:nvSpPr>
+          <p:cNvPr id="3" name="Notes Placeholder 2"/>
+          <p:cNvSpPr>
+            <a:spLocks noGrp="1"/>
+          </p:cNvSpPr>
+          <p:nvPr>
+            <p:ph type="body" idx="1"/>
+          </p:nvPr>
+        </p:nvSpPr>
+        <p:spPr/>
+        <p:txBody>
+          <a:bodyPr/>
+          <a:lstStyle/>
+          <a:p>
+            <a:r>
+              <a:rPr lang="en-US" dirty="0"/>
+              <a:t/>
+            </a:r>
+            <a:endParaRPr lang="en-US" dirty="0"/>
+          </a:p>
+        </p:txBody>
+      </p:sp>
+      <p:sp>
+        <p:nvSpPr>
+          <p:cNvPr id="4" name="Slide Number Placeholder 3"/>
+          <p:cNvSpPr>
+            <a:spLocks noGrp="1"/>
+          </p:cNvSpPr>
+          <p:nvPr>
+            <p:ph type="sldNum" sz="quarter" idx="10"/>
+          </p:nvPr>
+        </p:nvSpPr>
+        <p:spPr/>
+        <p:txBody>
+          <a:bodyPr/>
+          <a:lstStyle/>
+          <a:p>
+            <a:fld id="{F7021451-1387-4CA6-816F-3879F97B5CBC}" type="slidenum">
+              <a:rPr lang="en-US"/>
+              <a:t>6</a:t>
+            </a:fld>
+            <a:endParaRPr lang="en-US"/>
+          </a:p>
+        </p:txBody>
+      </p:sp>
+    </p:spTree>
+    <p:extLst>
+      <p:ext uri="{BB962C8B-B14F-4D97-AF65-F5344CB8AC3E}">
+        <p14:creationId xmlns:p14="http://schemas.microsoft.com/office/powerpoint/2010/main" val="1024086991"/>
+      </p:ext>
+    </p:extLst>
+  </p:cSld>
+  <p:clrMapOvr>
+    <a:masterClrMapping/>
+  </p:clrMapOvr>
+</p:notes>
+</file>
+
 <file path=ppt/slideLayouts/slideLayout1.xml><?xml version="1.0" encoding="utf-8"?>
 <p:sldLayout xmlns:a="http://schemas.openxmlformats.org/drawingml/2006/main" xmlns:r="http://schemas.openxmlformats.org/officeDocument/2006/relationships" xmlns:p="http://schemas.openxmlformats.org/presentationml/2006/main" preserve="1">
   <p:cSld name="DEFAULT">
@@ -5532,6 +5621,2388 @@
                 <a:ea typeface="Arial" pitchFamily="34" charset="-122"/>
                 <a:cs typeface="Arial" pitchFamily="34" charset="-120"/>
               </a:rPr>
+              <a:t>셋업 이슈 및 대책 (BSA EOL)</a:t>
+            </a:r>
+            <a:endParaRPr lang="en-US" sz="1200" dirty="0"/>
+          </a:p>
+        </p:txBody>
+      </p:sp>
+      <p:graphicFrame>
+        <p:nvGraphicFramePr>
+          <p:cNvPr id="6" name="Table 0"/>
+          <p:cNvGraphicFramePr>
+            <a:graphicFrameLocks noGrp="1"/>
+          </p:cNvGraphicFramePr>
+          <p:nvPr>
+            <p:extLst>
+              <p:ext uri="{D42A27DB-BD31-4B8C-83A1-F6EECF244321}">
+                <p14:modId xmlns:p14="http://schemas.microsoft.com/office/powerpoint/2010/main" val="1579011935"/>
+              </p:ext>
+            </p:extLst>
+          </p:nvPr>
+        </p:nvGraphicFramePr>
+        <p:xfrm>
+          <a:off x="365760" y="868680"/>
+          <a:ext cx="8412480" cy="914400"/>
+        </p:xfrm>
+        <a:graphic>
+          <a:graphicData uri="http://schemas.openxmlformats.org/drawingml/2006/table">
+            <a:tbl>
+              <a:tblPr/>
+              <a:tblGrid>
+                <a:gridCol w="457200"/>
+                <a:gridCol w="2651760"/>
+                <a:gridCol w="2286000"/>
+                <a:gridCol w="2468880"/>
+                <a:gridCol w="548640"/>
+              </a:tblGrid>
+              <a:tr h="320040">
+                <a:tc>
+                  <a:txBody>
+                    <a:bodyPr/>
+                    <a:lstStyle/>
+                    <a:p>
+                      <a:pPr algn="ctr" indent="0" marL="0">
+                        <a:buNone/>
+                      </a:pPr>
+                      <a:r>
+                        <a:rPr lang="en-US" sz="950" b="1" dirty="0">
+                          <a:solidFill>
+                            <a:srgbClr val="000000"/>
+                          </a:solidFill>
+                          <a:latin typeface="Arial" pitchFamily="34" charset="0"/>
+                          <a:ea typeface="Arial" pitchFamily="34" charset="-122"/>
+                          <a:cs typeface="Arial" pitchFamily="34" charset="-120"/>
+                        </a:rPr>
+                        <a:t>No.</a:t>
+                      </a:r>
+                      <a:endParaRPr lang="en-US" sz="950" dirty="0">
+                        <a:latin typeface="Arial" charset="0"/>
+                        <a:ea typeface="Arial" charset="0"/>
+                        <a:cs typeface="Arial" charset="0"/>
+                      </a:endParaRPr>
+                    </a:p>
+                  </a:txBody>
+                  <a:tcPr marL="73152" marR="73152" marT="45720" marB="45720" anchor="ctr">
+                    <a:lnL w="9525" cap="flat" cmpd="sng" algn="ctr">
+                      <a:solidFill>
+                        <a:srgbClr val="000000"/>
+                      </a:solidFill>
+                      <a:prstDash val="solid"/>
+                      <a:round/>
+                      <a:headEnd type="none" w="med" len="med"/>
+                      <a:tailEnd type="none" w="med" len="med"/>
+                    </a:lnL>
+                    <a:lnR w="9525" cap="flat" cmpd="sng" algn="ctr">
+                      <a:solidFill>
+                        <a:srgbClr val="000000"/>
+                      </a:solidFill>
+                      <a:prstDash val="solid"/>
+                      <a:round/>
+                      <a:headEnd type="none" w="med" len="med"/>
+                      <a:tailEnd type="none" w="med" len="med"/>
+                    </a:lnR>
+                    <a:lnT w="9525" cap="flat" cmpd="sng" algn="ctr">
+                      <a:solidFill>
+                        <a:srgbClr val="000000"/>
+                      </a:solidFill>
+                      <a:prstDash val="solid"/>
+                      <a:round/>
+                      <a:headEnd type="none" w="med" len="med"/>
+                      <a:tailEnd type="none" w="med" len="med"/>
+                    </a:lnT>
+                    <a:lnB w="9525" cap="flat" cmpd="sng" algn="ctr">
+                      <a:solidFill>
+                        <a:srgbClr val="000000"/>
+                      </a:solidFill>
+                      <a:prstDash val="solid"/>
+                      <a:round/>
+                      <a:headEnd type="none" w="med" len="med"/>
+                      <a:tailEnd type="none" w="med" len="med"/>
+                    </a:lnB>
+                    <a:solidFill>
+                      <a:srgbClr val="DCE6F1"/>
+                    </a:solidFill>
+                  </a:tcPr>
+                </a:tc>
+                <a:tc>
+                  <a:txBody>
+                    <a:bodyPr/>
+                    <a:lstStyle/>
+                    <a:p>
+                      <a:pPr algn="ctr" indent="0" marL="0">
+                        <a:buNone/>
+                      </a:pPr>
+                      <a:r>
+                        <a:rPr lang="en-US" sz="950" b="1" dirty="0">
+                          <a:solidFill>
+                            <a:srgbClr val="000000"/>
+                          </a:solidFill>
+                          <a:latin typeface="Arial" pitchFamily="34" charset="0"/>
+                          <a:ea typeface="Arial" pitchFamily="34" charset="-122"/>
+                          <a:cs typeface="Arial" pitchFamily="34" charset="-120"/>
+                        </a:rPr>
+                        <a:t>문제점 (AS-IS)</a:t>
+                      </a:r>
+                      <a:endParaRPr lang="en-US" sz="950" dirty="0">
+                        <a:latin typeface="Arial" charset="0"/>
+                        <a:ea typeface="Arial" charset="0"/>
+                        <a:cs typeface="Arial" charset="0"/>
+                      </a:endParaRPr>
+                    </a:p>
+                  </a:txBody>
+                  <a:tcPr marL="73152" marR="73152" marT="45720" marB="45720" anchor="ctr">
+                    <a:lnL w="9525" cap="flat" cmpd="sng" algn="ctr">
+                      <a:solidFill>
+                        <a:srgbClr val="000000"/>
+                      </a:solidFill>
+                      <a:prstDash val="solid"/>
+                      <a:round/>
+                      <a:headEnd type="none" w="med" len="med"/>
+                      <a:tailEnd type="none" w="med" len="med"/>
+                    </a:lnL>
+                    <a:lnR w="9525" cap="flat" cmpd="sng" algn="ctr">
+                      <a:solidFill>
+                        <a:srgbClr val="000000"/>
+                      </a:solidFill>
+                      <a:prstDash val="solid"/>
+                      <a:round/>
+                      <a:headEnd type="none" w="med" len="med"/>
+                      <a:tailEnd type="none" w="med" len="med"/>
+                    </a:lnR>
+                    <a:lnT w="9525" cap="flat" cmpd="sng" algn="ctr">
+                      <a:solidFill>
+                        <a:srgbClr val="000000"/>
+                      </a:solidFill>
+                      <a:prstDash val="solid"/>
+                      <a:round/>
+                      <a:headEnd type="none" w="med" len="med"/>
+                      <a:tailEnd type="none" w="med" len="med"/>
+                    </a:lnT>
+                    <a:lnB w="9525" cap="flat" cmpd="sng" algn="ctr">
+                      <a:solidFill>
+                        <a:srgbClr val="000000"/>
+                      </a:solidFill>
+                      <a:prstDash val="solid"/>
+                      <a:round/>
+                      <a:headEnd type="none" w="med" len="med"/>
+                      <a:tailEnd type="none" w="med" len="med"/>
+                    </a:lnB>
+                    <a:solidFill>
+                      <a:srgbClr val="DCE6F1"/>
+                    </a:solidFill>
+                  </a:tcPr>
+                </a:tc>
+                <a:tc>
+                  <a:txBody>
+                    <a:bodyPr/>
+                    <a:lstStyle/>
+                    <a:p>
+                      <a:pPr algn="ctr" indent="0" marL="0">
+                        <a:buNone/>
+                      </a:pPr>
+                      <a:r>
+                        <a:rPr lang="en-US" sz="950" b="1" dirty="0">
+                          <a:solidFill>
+                            <a:srgbClr val="000000"/>
+                          </a:solidFill>
+                          <a:latin typeface="Arial" pitchFamily="34" charset="0"/>
+                          <a:ea typeface="Arial" pitchFamily="34" charset="-122"/>
+                          <a:cs typeface="Arial" pitchFamily="34" charset="-120"/>
+                        </a:rPr>
+                        <a:t>원인</a:t>
+                      </a:r>
+                      <a:endParaRPr lang="en-US" sz="950" dirty="0">
+                        <a:latin typeface="Arial" charset="0"/>
+                        <a:ea typeface="Arial" charset="0"/>
+                        <a:cs typeface="Arial" charset="0"/>
+                      </a:endParaRPr>
+                    </a:p>
+                  </a:txBody>
+                  <a:tcPr marL="73152" marR="73152" marT="45720" marB="45720" anchor="ctr">
+                    <a:lnL w="9525" cap="flat" cmpd="sng" algn="ctr">
+                      <a:solidFill>
+                        <a:srgbClr val="000000"/>
+                      </a:solidFill>
+                      <a:prstDash val="solid"/>
+                      <a:round/>
+                      <a:headEnd type="none" w="med" len="med"/>
+                      <a:tailEnd type="none" w="med" len="med"/>
+                    </a:lnL>
+                    <a:lnR w="9525" cap="flat" cmpd="sng" algn="ctr">
+                      <a:solidFill>
+                        <a:srgbClr val="000000"/>
+                      </a:solidFill>
+                      <a:prstDash val="solid"/>
+                      <a:round/>
+                      <a:headEnd type="none" w="med" len="med"/>
+                      <a:tailEnd type="none" w="med" len="med"/>
+                    </a:lnR>
+                    <a:lnT w="9525" cap="flat" cmpd="sng" algn="ctr">
+                      <a:solidFill>
+                        <a:srgbClr val="000000"/>
+                      </a:solidFill>
+                      <a:prstDash val="solid"/>
+                      <a:round/>
+                      <a:headEnd type="none" w="med" len="med"/>
+                      <a:tailEnd type="none" w="med" len="med"/>
+                    </a:lnT>
+                    <a:lnB w="9525" cap="flat" cmpd="sng" algn="ctr">
+                      <a:solidFill>
+                        <a:srgbClr val="000000"/>
+                      </a:solidFill>
+                      <a:prstDash val="solid"/>
+                      <a:round/>
+                      <a:headEnd type="none" w="med" len="med"/>
+                      <a:tailEnd type="none" w="med" len="med"/>
+                    </a:lnB>
+                    <a:solidFill>
+                      <a:srgbClr val="DCE6F1"/>
+                    </a:solidFill>
+                  </a:tcPr>
+                </a:tc>
+                <a:tc>
+                  <a:txBody>
+                    <a:bodyPr/>
+                    <a:lstStyle/>
+                    <a:p>
+                      <a:pPr algn="ctr" indent="0" marL="0">
+                        <a:buNone/>
+                      </a:pPr>
+                      <a:r>
+                        <a:rPr lang="en-US" sz="950" b="1" dirty="0">
+                          <a:solidFill>
+                            <a:srgbClr val="000000"/>
+                          </a:solidFill>
+                          <a:latin typeface="Arial" pitchFamily="34" charset="0"/>
+                          <a:ea typeface="Arial" pitchFamily="34" charset="-122"/>
+                          <a:cs typeface="Arial" pitchFamily="34" charset="-120"/>
+                        </a:rPr>
+                        <a:t>대책 (TO-BE)</a:t>
+                      </a:r>
+                      <a:endParaRPr lang="en-US" sz="950" dirty="0">
+                        <a:latin typeface="Arial" charset="0"/>
+                        <a:ea typeface="Arial" charset="0"/>
+                        <a:cs typeface="Arial" charset="0"/>
+                      </a:endParaRPr>
+                    </a:p>
+                  </a:txBody>
+                  <a:tcPr marL="73152" marR="73152" marT="45720" marB="45720" anchor="ctr">
+                    <a:lnL w="9525" cap="flat" cmpd="sng" algn="ctr">
+                      <a:solidFill>
+                        <a:srgbClr val="000000"/>
+                      </a:solidFill>
+                      <a:prstDash val="solid"/>
+                      <a:round/>
+                      <a:headEnd type="none" w="med" len="med"/>
+                      <a:tailEnd type="none" w="med" len="med"/>
+                    </a:lnL>
+                    <a:lnR w="9525" cap="flat" cmpd="sng" algn="ctr">
+                      <a:solidFill>
+                        <a:srgbClr val="000000"/>
+                      </a:solidFill>
+                      <a:prstDash val="solid"/>
+                      <a:round/>
+                      <a:headEnd type="none" w="med" len="med"/>
+                      <a:tailEnd type="none" w="med" len="med"/>
+                    </a:lnR>
+                    <a:lnT w="9525" cap="flat" cmpd="sng" algn="ctr">
+                      <a:solidFill>
+                        <a:srgbClr val="000000"/>
+                      </a:solidFill>
+                      <a:prstDash val="solid"/>
+                      <a:round/>
+                      <a:headEnd type="none" w="med" len="med"/>
+                      <a:tailEnd type="none" w="med" len="med"/>
+                    </a:lnT>
+                    <a:lnB w="9525" cap="flat" cmpd="sng" algn="ctr">
+                      <a:solidFill>
+                        <a:srgbClr val="000000"/>
+                      </a:solidFill>
+                      <a:prstDash val="solid"/>
+                      <a:round/>
+                      <a:headEnd type="none" w="med" len="med"/>
+                      <a:tailEnd type="none" w="med" len="med"/>
+                    </a:lnB>
+                    <a:solidFill>
+                      <a:srgbClr val="DCE6F1"/>
+                    </a:solidFill>
+                  </a:tcPr>
+                </a:tc>
+                <a:tc>
+                  <a:txBody>
+                    <a:bodyPr/>
+                    <a:lstStyle/>
+                    <a:p>
+                      <a:pPr algn="ctr" indent="0" marL="0">
+                        <a:buNone/>
+                      </a:pPr>
+                      <a:r>
+                        <a:rPr lang="en-US" sz="950" b="1" dirty="0">
+                          <a:solidFill>
+                            <a:srgbClr val="000000"/>
+                          </a:solidFill>
+                          <a:latin typeface="Arial" pitchFamily="34" charset="0"/>
+                          <a:ea typeface="Arial" pitchFamily="34" charset="-122"/>
+                          <a:cs typeface="Arial" pitchFamily="34" charset="-120"/>
+                        </a:rPr>
+                        <a:t>적용일</a:t>
+                      </a:r>
+                      <a:endParaRPr lang="en-US" sz="950" dirty="0">
+                        <a:latin typeface="Arial" charset="0"/>
+                        <a:ea typeface="Arial" charset="0"/>
+                        <a:cs typeface="Arial" charset="0"/>
+                      </a:endParaRPr>
+                    </a:p>
+                  </a:txBody>
+                  <a:tcPr marL="73152" marR="73152" marT="45720" marB="45720" anchor="ctr">
+                    <a:lnL w="9525" cap="flat" cmpd="sng" algn="ctr">
+                      <a:solidFill>
+                        <a:srgbClr val="000000"/>
+                      </a:solidFill>
+                      <a:prstDash val="solid"/>
+                      <a:round/>
+                      <a:headEnd type="none" w="med" len="med"/>
+                      <a:tailEnd type="none" w="med" len="med"/>
+                    </a:lnL>
+                    <a:lnR w="9525" cap="flat" cmpd="sng" algn="ctr">
+                      <a:solidFill>
+                        <a:srgbClr val="000000"/>
+                      </a:solidFill>
+                      <a:prstDash val="solid"/>
+                      <a:round/>
+                      <a:headEnd type="none" w="med" len="med"/>
+                      <a:tailEnd type="none" w="med" len="med"/>
+                    </a:lnR>
+                    <a:lnT w="9525" cap="flat" cmpd="sng" algn="ctr">
+                      <a:solidFill>
+                        <a:srgbClr val="000000"/>
+                      </a:solidFill>
+                      <a:prstDash val="solid"/>
+                      <a:round/>
+                      <a:headEnd type="none" w="med" len="med"/>
+                      <a:tailEnd type="none" w="med" len="med"/>
+                    </a:lnT>
+                    <a:lnB w="9525" cap="flat" cmpd="sng" algn="ctr">
+                      <a:solidFill>
+                        <a:srgbClr val="000000"/>
+                      </a:solidFill>
+                      <a:prstDash val="solid"/>
+                      <a:round/>
+                      <a:headEnd type="none" w="med" len="med"/>
+                      <a:tailEnd type="none" w="med" len="med"/>
+                    </a:lnB>
+                    <a:solidFill>
+                      <a:srgbClr val="DCE6F1"/>
+                    </a:solidFill>
+                  </a:tcPr>
+                </a:tc>
+              </a:tr>
+              <a:tr h="868680">
+                <a:tc>
+                  <a:txBody>
+                    <a:bodyPr/>
+                    <a:lstStyle/>
+                    <a:p>
+                      <a:pPr algn="ctr" indent="0" marL="0">
+                        <a:buNone/>
+                      </a:pPr>
+                      <a:r>
+                        <a:rPr lang="en-US" sz="900" dirty="0">
+                          <a:solidFill>
+                            <a:srgbClr val="000000"/>
+                          </a:solidFill>
+                          <a:latin typeface="Arial" pitchFamily="34" charset="0"/>
+                          <a:ea typeface="Arial" pitchFamily="34" charset="-122"/>
+                          <a:cs typeface="Arial" pitchFamily="34" charset="-120"/>
+                        </a:rPr>
+                        <a:t>6</a:t>
+                      </a:r>
+                      <a:endParaRPr lang="en-US" sz="900" dirty="0">
+                        <a:latin typeface="Arial" charset="0"/>
+                        <a:ea typeface="Arial" charset="0"/>
+                        <a:cs typeface="Arial" charset="0"/>
+                      </a:endParaRPr>
+                    </a:p>
+                  </a:txBody>
+                  <a:tcPr marL="73152" marR="73152" marT="45720" marB="45720" anchor="ctr">
+                    <a:lnL w="9525" cap="flat" cmpd="sng" algn="ctr">
+                      <a:solidFill>
+                        <a:srgbClr val="000000"/>
+                      </a:solidFill>
+                      <a:prstDash val="solid"/>
+                      <a:round/>
+                      <a:headEnd type="none" w="med" len="med"/>
+                      <a:tailEnd type="none" w="med" len="med"/>
+                    </a:lnL>
+                    <a:lnR w="9525" cap="flat" cmpd="sng" algn="ctr">
+                      <a:solidFill>
+                        <a:srgbClr val="000000"/>
+                      </a:solidFill>
+                      <a:prstDash val="solid"/>
+                      <a:round/>
+                      <a:headEnd type="none" w="med" len="med"/>
+                      <a:tailEnd type="none" w="med" len="med"/>
+                    </a:lnR>
+                    <a:lnT w="9525" cap="flat" cmpd="sng" algn="ctr">
+                      <a:solidFill>
+                        <a:srgbClr val="000000"/>
+                      </a:solidFill>
+                      <a:prstDash val="solid"/>
+                      <a:round/>
+                      <a:headEnd type="none" w="med" len="med"/>
+                      <a:tailEnd type="none" w="med" len="med"/>
+                    </a:lnT>
+                    <a:lnB w="9525" cap="flat" cmpd="sng" algn="ctr">
+                      <a:solidFill>
+                        <a:srgbClr val="000000"/>
+                      </a:solidFill>
+                      <a:prstDash val="solid"/>
+                      <a:round/>
+                      <a:headEnd type="none" w="med" len="med"/>
+                      <a:tailEnd type="none" w="med" len="med"/>
+                    </a:lnB>
+                    <a:solidFill>
+                      <a:srgbClr val="FFFFFF"/>
+                    </a:solidFill>
+                  </a:tcPr>
+                </a:tc>
+                <a:tc>
+                  <a:txBody>
+                    <a:bodyPr/>
+                    <a:lstStyle/>
+                    <a:p>
+                      <a:pPr algn="l" indent="0" marL="0">
+                        <a:buNone/>
+                      </a:pPr>
+                      <a:r>
+                        <a:rPr lang="en-US" sz="900" dirty="0">
+                          <a:solidFill>
+                            <a:srgbClr val="000000"/>
+                          </a:solidFill>
+                          <a:latin typeface="Arial" pitchFamily="34" charset="0"/>
+                          <a:ea typeface="Arial" pitchFamily="34" charset="-122"/>
+                          <a:cs typeface="Arial" pitchFamily="34" charset="-120"/>
+                        </a:rPr>
+                        <a:t>기능 검사 전 캐리어 팝업 시 온도센서와 간섭 구간 기구물 수정 필요</a:t>
+                      </a:r>
+                      <a:endParaRPr lang="en-US" sz="900" dirty="0">
+                        <a:latin typeface="Arial" charset="0"/>
+                        <a:ea typeface="Arial" charset="0"/>
+                        <a:cs typeface="Arial" charset="0"/>
+                      </a:endParaRPr>
+                    </a:p>
+                  </a:txBody>
+                  <a:tcPr marL="73152" marR="73152" marT="45720" marB="45720" anchor="ctr">
+                    <a:lnL w="9525" cap="flat" cmpd="sng" algn="ctr">
+                      <a:solidFill>
+                        <a:srgbClr val="000000"/>
+                      </a:solidFill>
+                      <a:prstDash val="solid"/>
+                      <a:round/>
+                      <a:headEnd type="none" w="med" len="med"/>
+                      <a:tailEnd type="none" w="med" len="med"/>
+                    </a:lnL>
+                    <a:lnR w="9525" cap="flat" cmpd="sng" algn="ctr">
+                      <a:solidFill>
+                        <a:srgbClr val="000000"/>
+                      </a:solidFill>
+                      <a:prstDash val="solid"/>
+                      <a:round/>
+                      <a:headEnd type="none" w="med" len="med"/>
+                      <a:tailEnd type="none" w="med" len="med"/>
+                    </a:lnR>
+                    <a:lnT w="9525" cap="flat" cmpd="sng" algn="ctr">
+                      <a:solidFill>
+                        <a:srgbClr val="000000"/>
+                      </a:solidFill>
+                      <a:prstDash val="solid"/>
+                      <a:round/>
+                      <a:headEnd type="none" w="med" len="med"/>
+                      <a:tailEnd type="none" w="med" len="med"/>
+                    </a:lnT>
+                    <a:lnB w="9525" cap="flat" cmpd="sng" algn="ctr">
+                      <a:solidFill>
+                        <a:srgbClr val="000000"/>
+                      </a:solidFill>
+                      <a:prstDash val="solid"/>
+                      <a:round/>
+                      <a:headEnd type="none" w="med" len="med"/>
+                      <a:tailEnd type="none" w="med" len="med"/>
+                    </a:lnB>
+                    <a:solidFill>
+                      <a:srgbClr val="FFFFFF"/>
+                    </a:solidFill>
+                  </a:tcPr>
+                </a:tc>
+                <a:tc>
+                  <a:txBody>
+                    <a:bodyPr/>
+                    <a:lstStyle/>
+                    <a:p>
+                      <a:pPr algn="l" indent="0" marL="0">
+                        <a:buNone/>
+                      </a:pPr>
+                      <a:r>
+                        <a:rPr lang="en-US" sz="900" dirty="0">
+                          <a:solidFill>
+                            <a:srgbClr val="000000"/>
+                          </a:solidFill>
+                          <a:latin typeface="Arial" pitchFamily="34" charset="0"/>
+                          <a:ea typeface="Arial" pitchFamily="34" charset="-122"/>
+                          <a:cs typeface="Arial" pitchFamily="34" charset="-120"/>
+                        </a:rPr>
+                        <a:t>캐리어 팝업 동작 범위와 온도센서 위치 간 간섭 미검토</a:t>
+                      </a:r>
+                      <a:endParaRPr lang="en-US" sz="900" dirty="0">
+                        <a:latin typeface="Arial" charset="0"/>
+                        <a:ea typeface="Arial" charset="0"/>
+                        <a:cs typeface="Arial" charset="0"/>
+                      </a:endParaRPr>
+                    </a:p>
+                  </a:txBody>
+                  <a:tcPr marL="73152" marR="73152" marT="45720" marB="45720" anchor="ctr">
+                    <a:lnL w="9525" cap="flat" cmpd="sng" algn="ctr">
+                      <a:solidFill>
+                        <a:srgbClr val="000000"/>
+                      </a:solidFill>
+                      <a:prstDash val="solid"/>
+                      <a:round/>
+                      <a:headEnd type="none" w="med" len="med"/>
+                      <a:tailEnd type="none" w="med" len="med"/>
+                    </a:lnL>
+                    <a:lnR w="9525" cap="flat" cmpd="sng" algn="ctr">
+                      <a:solidFill>
+                        <a:srgbClr val="000000"/>
+                      </a:solidFill>
+                      <a:prstDash val="solid"/>
+                      <a:round/>
+                      <a:headEnd type="none" w="med" len="med"/>
+                      <a:tailEnd type="none" w="med" len="med"/>
+                    </a:lnR>
+                    <a:lnT w="9525" cap="flat" cmpd="sng" algn="ctr">
+                      <a:solidFill>
+                        <a:srgbClr val="000000"/>
+                      </a:solidFill>
+                      <a:prstDash val="solid"/>
+                      <a:round/>
+                      <a:headEnd type="none" w="med" len="med"/>
+                      <a:tailEnd type="none" w="med" len="med"/>
+                    </a:lnT>
+                    <a:lnB w="9525" cap="flat" cmpd="sng" algn="ctr">
+                      <a:solidFill>
+                        <a:srgbClr val="000000"/>
+                      </a:solidFill>
+                      <a:prstDash val="solid"/>
+                      <a:round/>
+                      <a:headEnd type="none" w="med" len="med"/>
+                      <a:tailEnd type="none" w="med" len="med"/>
+                    </a:lnB>
+                    <a:solidFill>
+                      <a:srgbClr val="FFFFFF"/>
+                    </a:solidFill>
+                  </a:tcPr>
+                </a:tc>
+                <a:tc>
+                  <a:txBody>
+                    <a:bodyPr/>
+                    <a:lstStyle/>
+                    <a:p>
+                      <a:pPr algn="l" indent="0" marL="0">
+                        <a:buNone/>
+                      </a:pPr>
+                      <a:r>
+                        <a:rPr lang="en-US" sz="900" dirty="0">
+                          <a:solidFill>
+                            <a:srgbClr val="000000"/>
+                          </a:solidFill>
+                          <a:latin typeface="Arial" pitchFamily="34" charset="0"/>
+                          <a:ea typeface="Arial" pitchFamily="34" charset="-122"/>
+                          <a:cs typeface="Arial" pitchFamily="34" charset="-120"/>
+                        </a:rPr>
+                        <a:t>간섭 구간 기구물 수정 예정</a:t>
+                      </a:r>
+                      <a:endParaRPr lang="en-US" sz="900" dirty="0">
+                        <a:latin typeface="Arial" charset="0"/>
+                        <a:ea typeface="Arial" charset="0"/>
+                        <a:cs typeface="Arial" charset="0"/>
+                      </a:endParaRPr>
+                    </a:p>
+                  </a:txBody>
+                  <a:tcPr marL="73152" marR="73152" marT="45720" marB="45720" anchor="ctr">
+                    <a:lnL w="9525" cap="flat" cmpd="sng" algn="ctr">
+                      <a:solidFill>
+                        <a:srgbClr val="000000"/>
+                      </a:solidFill>
+                      <a:prstDash val="solid"/>
+                      <a:round/>
+                      <a:headEnd type="none" w="med" len="med"/>
+                      <a:tailEnd type="none" w="med" len="med"/>
+                    </a:lnL>
+                    <a:lnR w="9525" cap="flat" cmpd="sng" algn="ctr">
+                      <a:solidFill>
+                        <a:srgbClr val="000000"/>
+                      </a:solidFill>
+                      <a:prstDash val="solid"/>
+                      <a:round/>
+                      <a:headEnd type="none" w="med" len="med"/>
+                      <a:tailEnd type="none" w="med" len="med"/>
+                    </a:lnR>
+                    <a:lnT w="9525" cap="flat" cmpd="sng" algn="ctr">
+                      <a:solidFill>
+                        <a:srgbClr val="000000"/>
+                      </a:solidFill>
+                      <a:prstDash val="solid"/>
+                      <a:round/>
+                      <a:headEnd type="none" w="med" len="med"/>
+                      <a:tailEnd type="none" w="med" len="med"/>
+                    </a:lnT>
+                    <a:lnB w="9525" cap="flat" cmpd="sng" algn="ctr">
+                      <a:solidFill>
+                        <a:srgbClr val="000000"/>
+                      </a:solidFill>
+                      <a:prstDash val="solid"/>
+                      <a:round/>
+                      <a:headEnd type="none" w="med" len="med"/>
+                      <a:tailEnd type="none" w="med" len="med"/>
+                    </a:lnB>
+                    <a:solidFill>
+                      <a:srgbClr val="FFFFFF"/>
+                    </a:solidFill>
+                  </a:tcPr>
+                </a:tc>
+                <a:tc>
+                  <a:txBody>
+                    <a:bodyPr/>
+                    <a:lstStyle/>
+                    <a:p>
+                      <a:pPr algn="ctr" indent="0" marL="0">
+                        <a:buNone/>
+                      </a:pPr>
+                      <a:r>
+                        <a:rPr lang="en-US" sz="900" dirty="0">
+                          <a:solidFill>
+                            <a:srgbClr val="000000"/>
+                          </a:solidFill>
+                          <a:latin typeface="Arial" pitchFamily="34" charset="0"/>
+                          <a:ea typeface="Arial" pitchFamily="34" charset="-122"/>
+                          <a:cs typeface="Arial" pitchFamily="34" charset="-120"/>
+                        </a:rPr>
+                        <a:t>7/23</a:t>
+                      </a:r>
+                      <a:endParaRPr lang="en-US" sz="900" dirty="0">
+                        <a:latin typeface="Arial" charset="0"/>
+                        <a:ea typeface="Arial" charset="0"/>
+                        <a:cs typeface="Arial" charset="0"/>
+                      </a:endParaRPr>
+                    </a:p>
+                  </a:txBody>
+                  <a:tcPr marL="73152" marR="73152" marT="45720" marB="45720" anchor="ctr">
+                    <a:lnL w="9525" cap="flat" cmpd="sng" algn="ctr">
+                      <a:solidFill>
+                        <a:srgbClr val="000000"/>
+                      </a:solidFill>
+                      <a:prstDash val="solid"/>
+                      <a:round/>
+                      <a:headEnd type="none" w="med" len="med"/>
+                      <a:tailEnd type="none" w="med" len="med"/>
+                    </a:lnL>
+                    <a:lnR w="9525" cap="flat" cmpd="sng" algn="ctr">
+                      <a:solidFill>
+                        <a:srgbClr val="000000"/>
+                      </a:solidFill>
+                      <a:prstDash val="solid"/>
+                      <a:round/>
+                      <a:headEnd type="none" w="med" len="med"/>
+                      <a:tailEnd type="none" w="med" len="med"/>
+                    </a:lnR>
+                    <a:lnT w="9525" cap="flat" cmpd="sng" algn="ctr">
+                      <a:solidFill>
+                        <a:srgbClr val="000000"/>
+                      </a:solidFill>
+                      <a:prstDash val="solid"/>
+                      <a:round/>
+                      <a:headEnd type="none" w="med" len="med"/>
+                      <a:tailEnd type="none" w="med" len="med"/>
+                    </a:lnT>
+                    <a:lnB w="9525" cap="flat" cmpd="sng" algn="ctr">
+                      <a:solidFill>
+                        <a:srgbClr val="000000"/>
+                      </a:solidFill>
+                      <a:prstDash val="solid"/>
+                      <a:round/>
+                      <a:headEnd type="none" w="med" len="med"/>
+                      <a:tailEnd type="none" w="med" len="med"/>
+                    </a:lnB>
+                    <a:solidFill>
+                      <a:srgbClr val="FFFFFF"/>
+                    </a:solidFill>
+                  </a:tcPr>
+                </a:tc>
+              </a:tr>
+              <a:tr h="777240">
+                <a:tc>
+                  <a:txBody>
+                    <a:bodyPr/>
+                    <a:lstStyle/>
+                    <a:p>
+                      <a:pPr algn="ctr" indent="0" marL="0">
+                        <a:buNone/>
+                      </a:pPr>
+                      <a:r>
+                        <a:rPr lang="en-US" sz="900" dirty="0">
+                          <a:solidFill>
+                            <a:srgbClr val="000000"/>
+                          </a:solidFill>
+                          <a:latin typeface="Arial" pitchFamily="34" charset="0"/>
+                          <a:ea typeface="Arial" pitchFamily="34" charset="-122"/>
+                          <a:cs typeface="Arial" pitchFamily="34" charset="-120"/>
+                        </a:rPr>
+                        <a:t>7</a:t>
+                      </a:r>
+                      <a:endParaRPr lang="en-US" sz="900" dirty="0">
+                        <a:latin typeface="Arial" charset="0"/>
+                        <a:ea typeface="Arial" charset="0"/>
+                        <a:cs typeface="Arial" charset="0"/>
+                      </a:endParaRPr>
+                    </a:p>
+                  </a:txBody>
+                  <a:tcPr marL="73152" marR="73152" marT="45720" marB="45720" anchor="ctr">
+                    <a:lnL w="9525" cap="flat" cmpd="sng" algn="ctr">
+                      <a:solidFill>
+                        <a:srgbClr val="000000"/>
+                      </a:solidFill>
+                      <a:prstDash val="solid"/>
+                      <a:round/>
+                      <a:headEnd type="none" w="med" len="med"/>
+                      <a:tailEnd type="none" w="med" len="med"/>
+                    </a:lnL>
+                    <a:lnR w="9525" cap="flat" cmpd="sng" algn="ctr">
+                      <a:solidFill>
+                        <a:srgbClr val="000000"/>
+                      </a:solidFill>
+                      <a:prstDash val="solid"/>
+                      <a:round/>
+                      <a:headEnd type="none" w="med" len="med"/>
+                      <a:tailEnd type="none" w="med" len="med"/>
+                    </a:lnR>
+                    <a:lnT w="9525" cap="flat" cmpd="sng" algn="ctr">
+                      <a:solidFill>
+                        <a:srgbClr val="000000"/>
+                      </a:solidFill>
+                      <a:prstDash val="solid"/>
+                      <a:round/>
+                      <a:headEnd type="none" w="med" len="med"/>
+                      <a:tailEnd type="none" w="med" len="med"/>
+                    </a:lnT>
+                    <a:lnB w="9525" cap="flat" cmpd="sng" algn="ctr">
+                      <a:solidFill>
+                        <a:srgbClr val="000000"/>
+                      </a:solidFill>
+                      <a:prstDash val="solid"/>
+                      <a:round/>
+                      <a:headEnd type="none" w="med" len="med"/>
+                      <a:tailEnd type="none" w="med" len="med"/>
+                    </a:lnB>
+                    <a:solidFill>
+                      <a:srgbClr val="FFFFFF"/>
+                    </a:solidFill>
+                  </a:tcPr>
+                </a:tc>
+                <a:tc>
+                  <a:txBody>
+                    <a:bodyPr/>
+                    <a:lstStyle/>
+                    <a:p>
+                      <a:pPr algn="l" indent="0" marL="0">
+                        <a:buNone/>
+                      </a:pPr>
+                      <a:r>
+                        <a:rPr lang="en-US" sz="900" dirty="0">
+                          <a:solidFill>
+                            <a:srgbClr val="000000"/>
+                          </a:solidFill>
+                          <a:latin typeface="Arial" pitchFamily="34" charset="0"/>
+                          <a:ea typeface="Arial" pitchFamily="34" charset="-122"/>
+                          <a:cs typeface="Arial" pitchFamily="34" charset="-120"/>
+                        </a:rPr>
+                        <a:t>기능 검사 전 부품 바코드 리딩 확보 필요</a:t>
+                      </a:r>
+                      <a:endParaRPr lang="en-US" sz="900" dirty="0">
+                        <a:latin typeface="Arial" charset="0"/>
+                        <a:ea typeface="Arial" charset="0"/>
+                        <a:cs typeface="Arial" charset="0"/>
+                      </a:endParaRPr>
+                    </a:p>
+                  </a:txBody>
+                  <a:tcPr marL="73152" marR="73152" marT="45720" marB="45720" anchor="ctr">
+                    <a:lnL w="9525" cap="flat" cmpd="sng" algn="ctr">
+                      <a:solidFill>
+                        <a:srgbClr val="000000"/>
+                      </a:solidFill>
+                      <a:prstDash val="solid"/>
+                      <a:round/>
+                      <a:headEnd type="none" w="med" len="med"/>
+                      <a:tailEnd type="none" w="med" len="med"/>
+                    </a:lnL>
+                    <a:lnR w="9525" cap="flat" cmpd="sng" algn="ctr">
+                      <a:solidFill>
+                        <a:srgbClr val="000000"/>
+                      </a:solidFill>
+                      <a:prstDash val="solid"/>
+                      <a:round/>
+                      <a:headEnd type="none" w="med" len="med"/>
+                      <a:tailEnd type="none" w="med" len="med"/>
+                    </a:lnR>
+                    <a:lnT w="9525" cap="flat" cmpd="sng" algn="ctr">
+                      <a:solidFill>
+                        <a:srgbClr val="000000"/>
+                      </a:solidFill>
+                      <a:prstDash val="solid"/>
+                      <a:round/>
+                      <a:headEnd type="none" w="med" len="med"/>
+                      <a:tailEnd type="none" w="med" len="med"/>
+                    </a:lnT>
+                    <a:lnB w="9525" cap="flat" cmpd="sng" algn="ctr">
+                      <a:solidFill>
+                        <a:srgbClr val="000000"/>
+                      </a:solidFill>
+                      <a:prstDash val="solid"/>
+                      <a:round/>
+                      <a:headEnd type="none" w="med" len="med"/>
+                      <a:tailEnd type="none" w="med" len="med"/>
+                    </a:lnB>
+                    <a:solidFill>
+                      <a:srgbClr val="FFFFFF"/>
+                    </a:solidFill>
+                  </a:tcPr>
+                </a:tc>
+                <a:tc>
+                  <a:txBody>
+                    <a:bodyPr/>
+                    <a:lstStyle/>
+                    <a:p>
+                      <a:pPr algn="l" indent="0" marL="0">
+                        <a:buNone/>
+                      </a:pPr>
+                      <a:r>
+                        <a:rPr lang="en-US" sz="900" dirty="0">
+                          <a:solidFill>
+                            <a:srgbClr val="000000"/>
+                          </a:solidFill>
+                          <a:latin typeface="Arial" pitchFamily="34" charset="0"/>
+                          <a:ea typeface="Arial" pitchFamily="34" charset="-122"/>
+                          <a:cs typeface="Arial" pitchFamily="34" charset="-120"/>
+                        </a:rPr>
+                        <a:t>부품 바코드 위치와 리더기 설치 위치 간 불일치</a:t>
+                      </a:r>
+                      <a:endParaRPr lang="en-US" sz="900" dirty="0">
+                        <a:latin typeface="Arial" charset="0"/>
+                        <a:ea typeface="Arial" charset="0"/>
+                        <a:cs typeface="Arial" charset="0"/>
+                      </a:endParaRPr>
+                    </a:p>
+                  </a:txBody>
+                  <a:tcPr marL="73152" marR="73152" marT="45720" marB="45720" anchor="ctr">
+                    <a:lnL w="9525" cap="flat" cmpd="sng" algn="ctr">
+                      <a:solidFill>
+                        <a:srgbClr val="000000"/>
+                      </a:solidFill>
+                      <a:prstDash val="solid"/>
+                      <a:round/>
+                      <a:headEnd type="none" w="med" len="med"/>
+                      <a:tailEnd type="none" w="med" len="med"/>
+                    </a:lnL>
+                    <a:lnR w="9525" cap="flat" cmpd="sng" algn="ctr">
+                      <a:solidFill>
+                        <a:srgbClr val="000000"/>
+                      </a:solidFill>
+                      <a:prstDash val="solid"/>
+                      <a:round/>
+                      <a:headEnd type="none" w="med" len="med"/>
+                      <a:tailEnd type="none" w="med" len="med"/>
+                    </a:lnR>
+                    <a:lnT w="9525" cap="flat" cmpd="sng" algn="ctr">
+                      <a:solidFill>
+                        <a:srgbClr val="000000"/>
+                      </a:solidFill>
+                      <a:prstDash val="solid"/>
+                      <a:round/>
+                      <a:headEnd type="none" w="med" len="med"/>
+                      <a:tailEnd type="none" w="med" len="med"/>
+                    </a:lnT>
+                    <a:lnB w="9525" cap="flat" cmpd="sng" algn="ctr">
+                      <a:solidFill>
+                        <a:srgbClr val="000000"/>
+                      </a:solidFill>
+                      <a:prstDash val="solid"/>
+                      <a:round/>
+                      <a:headEnd type="none" w="med" len="med"/>
+                      <a:tailEnd type="none" w="med" len="med"/>
+                    </a:lnB>
+                    <a:solidFill>
+                      <a:srgbClr val="FFFFFF"/>
+                    </a:solidFill>
+                  </a:tcPr>
+                </a:tc>
+                <a:tc>
+                  <a:txBody>
+                    <a:bodyPr/>
+                    <a:lstStyle/>
+                    <a:p>
+                      <a:pPr algn="l" indent="0" marL="0">
+                        <a:buNone/>
+                      </a:pPr>
+                      <a:r>
+                        <a:rPr lang="en-US" sz="900" dirty="0">
+                          <a:solidFill>
+                            <a:srgbClr val="000000"/>
+                          </a:solidFill>
+                          <a:latin typeface="Arial" pitchFamily="34" charset="0"/>
+                          <a:ea typeface="Arial" pitchFamily="34" charset="-122"/>
+                          <a:cs typeface="Arial" pitchFamily="34" charset="-120"/>
+                        </a:rPr>
+                        <a:t>리더기 위치 조정 또는 재배치 예정</a:t>
+                      </a:r>
+                      <a:endParaRPr lang="en-US" sz="900" dirty="0">
+                        <a:latin typeface="Arial" charset="0"/>
+                        <a:ea typeface="Arial" charset="0"/>
+                        <a:cs typeface="Arial" charset="0"/>
+                      </a:endParaRPr>
+                    </a:p>
+                  </a:txBody>
+                  <a:tcPr marL="73152" marR="73152" marT="45720" marB="45720" anchor="ctr">
+                    <a:lnL w="9525" cap="flat" cmpd="sng" algn="ctr">
+                      <a:solidFill>
+                        <a:srgbClr val="000000"/>
+                      </a:solidFill>
+                      <a:prstDash val="solid"/>
+                      <a:round/>
+                      <a:headEnd type="none" w="med" len="med"/>
+                      <a:tailEnd type="none" w="med" len="med"/>
+                    </a:lnL>
+                    <a:lnR w="9525" cap="flat" cmpd="sng" algn="ctr">
+                      <a:solidFill>
+                        <a:srgbClr val="000000"/>
+                      </a:solidFill>
+                      <a:prstDash val="solid"/>
+                      <a:round/>
+                      <a:headEnd type="none" w="med" len="med"/>
+                      <a:tailEnd type="none" w="med" len="med"/>
+                    </a:lnR>
+                    <a:lnT w="9525" cap="flat" cmpd="sng" algn="ctr">
+                      <a:solidFill>
+                        <a:srgbClr val="000000"/>
+                      </a:solidFill>
+                      <a:prstDash val="solid"/>
+                      <a:round/>
+                      <a:headEnd type="none" w="med" len="med"/>
+                      <a:tailEnd type="none" w="med" len="med"/>
+                    </a:lnT>
+                    <a:lnB w="9525" cap="flat" cmpd="sng" algn="ctr">
+                      <a:solidFill>
+                        <a:srgbClr val="000000"/>
+                      </a:solidFill>
+                      <a:prstDash val="solid"/>
+                      <a:round/>
+                      <a:headEnd type="none" w="med" len="med"/>
+                      <a:tailEnd type="none" w="med" len="med"/>
+                    </a:lnB>
+                    <a:solidFill>
+                      <a:srgbClr val="FFFFFF"/>
+                    </a:solidFill>
+                  </a:tcPr>
+                </a:tc>
+                <a:tc>
+                  <a:txBody>
+                    <a:bodyPr/>
+                    <a:lstStyle/>
+                    <a:p>
+                      <a:pPr algn="ctr" indent="0" marL="0">
+                        <a:buNone/>
+                      </a:pPr>
+                      <a:r>
+                        <a:rPr lang="en-US" sz="900" dirty="0">
+                          <a:solidFill>
+                            <a:srgbClr val="000000"/>
+                          </a:solidFill>
+                          <a:latin typeface="Arial" pitchFamily="34" charset="0"/>
+                          <a:ea typeface="Arial" pitchFamily="34" charset="-122"/>
+                          <a:cs typeface="Arial" pitchFamily="34" charset="-120"/>
+                        </a:rPr>
+                        <a:t>7/23</a:t>
+                      </a:r>
+                      <a:endParaRPr lang="en-US" sz="900" dirty="0">
+                        <a:latin typeface="Arial" charset="0"/>
+                        <a:ea typeface="Arial" charset="0"/>
+                        <a:cs typeface="Arial" charset="0"/>
+                      </a:endParaRPr>
+                    </a:p>
+                  </a:txBody>
+                  <a:tcPr marL="73152" marR="73152" marT="45720" marB="45720" anchor="ctr">
+                    <a:lnL w="9525" cap="flat" cmpd="sng" algn="ctr">
+                      <a:solidFill>
+                        <a:srgbClr val="000000"/>
+                      </a:solidFill>
+                      <a:prstDash val="solid"/>
+                      <a:round/>
+                      <a:headEnd type="none" w="med" len="med"/>
+                      <a:tailEnd type="none" w="med" len="med"/>
+                    </a:lnL>
+                    <a:lnR w="9525" cap="flat" cmpd="sng" algn="ctr">
+                      <a:solidFill>
+                        <a:srgbClr val="000000"/>
+                      </a:solidFill>
+                      <a:prstDash val="solid"/>
+                      <a:round/>
+                      <a:headEnd type="none" w="med" len="med"/>
+                      <a:tailEnd type="none" w="med" len="med"/>
+                    </a:lnR>
+                    <a:lnT w="9525" cap="flat" cmpd="sng" algn="ctr">
+                      <a:solidFill>
+                        <a:srgbClr val="000000"/>
+                      </a:solidFill>
+                      <a:prstDash val="solid"/>
+                      <a:round/>
+                      <a:headEnd type="none" w="med" len="med"/>
+                      <a:tailEnd type="none" w="med" len="med"/>
+                    </a:lnT>
+                    <a:lnB w="9525" cap="flat" cmpd="sng" algn="ctr">
+                      <a:solidFill>
+                        <a:srgbClr val="000000"/>
+                      </a:solidFill>
+                      <a:prstDash val="solid"/>
+                      <a:round/>
+                      <a:headEnd type="none" w="med" len="med"/>
+                      <a:tailEnd type="none" w="med" len="med"/>
+                    </a:lnB>
+                    <a:solidFill>
+                      <a:srgbClr val="FFFFFF"/>
+                    </a:solidFill>
+                  </a:tcPr>
+                </a:tc>
+              </a:tr>
+              <a:tr h="960120">
+                <a:tc>
+                  <a:txBody>
+                    <a:bodyPr/>
+                    <a:lstStyle/>
+                    <a:p>
+                      <a:pPr algn="ctr" indent="0" marL="0">
+                        <a:buNone/>
+                      </a:pPr>
+                      <a:r>
+                        <a:rPr lang="en-US" sz="900" dirty="0">
+                          <a:solidFill>
+                            <a:srgbClr val="000000"/>
+                          </a:solidFill>
+                          <a:latin typeface="Arial" pitchFamily="34" charset="0"/>
+                          <a:ea typeface="Arial" pitchFamily="34" charset="-122"/>
+                          <a:cs typeface="Arial" pitchFamily="34" charset="-120"/>
+                        </a:rPr>
+                        <a:t>8</a:t>
+                      </a:r>
+                      <a:endParaRPr lang="en-US" sz="900" dirty="0">
+                        <a:latin typeface="Arial" charset="0"/>
+                        <a:ea typeface="Arial" charset="0"/>
+                        <a:cs typeface="Arial" charset="0"/>
+                      </a:endParaRPr>
+                    </a:p>
+                  </a:txBody>
+                  <a:tcPr marL="73152" marR="73152" marT="45720" marB="45720" anchor="ctr">
+                    <a:lnL w="9525" cap="flat" cmpd="sng" algn="ctr">
+                      <a:solidFill>
+                        <a:srgbClr val="000000"/>
+                      </a:solidFill>
+                      <a:prstDash val="solid"/>
+                      <a:round/>
+                      <a:headEnd type="none" w="med" len="med"/>
+                      <a:tailEnd type="none" w="med" len="med"/>
+                    </a:lnL>
+                    <a:lnR w="9525" cap="flat" cmpd="sng" algn="ctr">
+                      <a:solidFill>
+                        <a:srgbClr val="000000"/>
+                      </a:solidFill>
+                      <a:prstDash val="solid"/>
+                      <a:round/>
+                      <a:headEnd type="none" w="med" len="med"/>
+                      <a:tailEnd type="none" w="med" len="med"/>
+                    </a:lnR>
+                    <a:lnT w="9525" cap="flat" cmpd="sng" algn="ctr">
+                      <a:solidFill>
+                        <a:srgbClr val="000000"/>
+                      </a:solidFill>
+                      <a:prstDash val="solid"/>
+                      <a:round/>
+                      <a:headEnd type="none" w="med" len="med"/>
+                      <a:tailEnd type="none" w="med" len="med"/>
+                    </a:lnT>
+                    <a:lnB w="9525" cap="flat" cmpd="sng" algn="ctr">
+                      <a:solidFill>
+                        <a:srgbClr val="000000"/>
+                      </a:solidFill>
+                      <a:prstDash val="solid"/>
+                      <a:round/>
+                      <a:headEnd type="none" w="med" len="med"/>
+                      <a:tailEnd type="none" w="med" len="med"/>
+                    </a:lnB>
+                    <a:solidFill>
+                      <a:srgbClr val="FFFFFF"/>
+                    </a:solidFill>
+                  </a:tcPr>
+                </a:tc>
+                <a:tc>
+                  <a:txBody>
+                    <a:bodyPr/>
+                    <a:lstStyle/>
+                    <a:p>
+                      <a:pPr algn="l" indent="0" marL="0">
+                        <a:buNone/>
+                      </a:pPr>
+                      <a:r>
+                        <a:rPr lang="en-US" sz="900" dirty="0">
+                          <a:solidFill>
+                            <a:srgbClr val="000000"/>
+                          </a:solidFill>
+                          <a:latin typeface="Arial" pitchFamily="34" charset="0"/>
+                          <a:ea typeface="Arial" pitchFamily="34" charset="-122"/>
+                          <a:cs typeface="Arial" pitchFamily="34" charset="-120"/>
+                        </a:rPr>
+                        <a:t>내전압 검사 시 상부 동판과 FPCB 본딩부 코팅 영역(면적 증가 시) 간 접착 방지 대안 수립 필요</a:t>
+                      </a:r>
+                      <a:endParaRPr lang="en-US" sz="900" dirty="0">
+                        <a:latin typeface="Arial" charset="0"/>
+                        <a:ea typeface="Arial" charset="0"/>
+                        <a:cs typeface="Arial" charset="0"/>
+                      </a:endParaRPr>
+                    </a:p>
+                  </a:txBody>
+                  <a:tcPr marL="73152" marR="73152" marT="45720" marB="45720" anchor="ctr">
+                    <a:lnL w="9525" cap="flat" cmpd="sng" algn="ctr">
+                      <a:solidFill>
+                        <a:srgbClr val="000000"/>
+                      </a:solidFill>
+                      <a:prstDash val="solid"/>
+                      <a:round/>
+                      <a:headEnd type="none" w="med" len="med"/>
+                      <a:tailEnd type="none" w="med" len="med"/>
+                    </a:lnL>
+                    <a:lnR w="9525" cap="flat" cmpd="sng" algn="ctr">
+                      <a:solidFill>
+                        <a:srgbClr val="000000"/>
+                      </a:solidFill>
+                      <a:prstDash val="solid"/>
+                      <a:round/>
+                      <a:headEnd type="none" w="med" len="med"/>
+                      <a:tailEnd type="none" w="med" len="med"/>
+                    </a:lnR>
+                    <a:lnT w="9525" cap="flat" cmpd="sng" algn="ctr">
+                      <a:solidFill>
+                        <a:srgbClr val="000000"/>
+                      </a:solidFill>
+                      <a:prstDash val="solid"/>
+                      <a:round/>
+                      <a:headEnd type="none" w="med" len="med"/>
+                      <a:tailEnd type="none" w="med" len="med"/>
+                    </a:lnT>
+                    <a:lnB w="9525" cap="flat" cmpd="sng" algn="ctr">
+                      <a:solidFill>
+                        <a:srgbClr val="000000"/>
+                      </a:solidFill>
+                      <a:prstDash val="solid"/>
+                      <a:round/>
+                      <a:headEnd type="none" w="med" len="med"/>
+                      <a:tailEnd type="none" w="med" len="med"/>
+                    </a:lnB>
+                    <a:solidFill>
+                      <a:srgbClr val="FFFFFF"/>
+                    </a:solidFill>
+                  </a:tcPr>
+                </a:tc>
+                <a:tc>
+                  <a:txBody>
+                    <a:bodyPr/>
+                    <a:lstStyle/>
+                    <a:p>
+                      <a:pPr algn="l" indent="0" marL="0">
+                        <a:buNone/>
+                      </a:pPr>
+                      <a:r>
+                        <a:rPr lang="en-US" sz="900" dirty="0">
+                          <a:solidFill>
+                            <a:srgbClr val="000000"/>
+                          </a:solidFill>
+                          <a:latin typeface="Arial" pitchFamily="34" charset="0"/>
+                          <a:ea typeface="Arial" pitchFamily="34" charset="-122"/>
+                          <a:cs typeface="Arial" pitchFamily="34" charset="-120"/>
+                        </a:rPr>
+                        <a:t>코팅 면적 증가에 따른 상부 동판과의 접촉·접착 가능성 사전 검토 미흡</a:t>
+                      </a:r>
+                      <a:endParaRPr lang="en-US" sz="900" dirty="0">
+                        <a:latin typeface="Arial" charset="0"/>
+                        <a:ea typeface="Arial" charset="0"/>
+                        <a:cs typeface="Arial" charset="0"/>
+                      </a:endParaRPr>
+                    </a:p>
+                  </a:txBody>
+                  <a:tcPr marL="73152" marR="73152" marT="45720" marB="45720" anchor="ctr">
+                    <a:lnL w="9525" cap="flat" cmpd="sng" algn="ctr">
+                      <a:solidFill>
+                        <a:srgbClr val="000000"/>
+                      </a:solidFill>
+                      <a:prstDash val="solid"/>
+                      <a:round/>
+                      <a:headEnd type="none" w="med" len="med"/>
+                      <a:tailEnd type="none" w="med" len="med"/>
+                    </a:lnL>
+                    <a:lnR w="9525" cap="flat" cmpd="sng" algn="ctr">
+                      <a:solidFill>
+                        <a:srgbClr val="000000"/>
+                      </a:solidFill>
+                      <a:prstDash val="solid"/>
+                      <a:round/>
+                      <a:headEnd type="none" w="med" len="med"/>
+                      <a:tailEnd type="none" w="med" len="med"/>
+                    </a:lnR>
+                    <a:lnT w="9525" cap="flat" cmpd="sng" algn="ctr">
+                      <a:solidFill>
+                        <a:srgbClr val="000000"/>
+                      </a:solidFill>
+                      <a:prstDash val="solid"/>
+                      <a:round/>
+                      <a:headEnd type="none" w="med" len="med"/>
+                      <a:tailEnd type="none" w="med" len="med"/>
+                    </a:lnT>
+                    <a:lnB w="9525" cap="flat" cmpd="sng" algn="ctr">
+                      <a:solidFill>
+                        <a:srgbClr val="000000"/>
+                      </a:solidFill>
+                      <a:prstDash val="solid"/>
+                      <a:round/>
+                      <a:headEnd type="none" w="med" len="med"/>
+                      <a:tailEnd type="none" w="med" len="med"/>
+                    </a:lnB>
+                    <a:solidFill>
+                      <a:srgbClr val="FFFFFF"/>
+                    </a:solidFill>
+                  </a:tcPr>
+                </a:tc>
+                <a:tc>
+                  <a:txBody>
+                    <a:bodyPr/>
+                    <a:lstStyle/>
+                    <a:p>
+                      <a:pPr algn="l" indent="0" marL="0">
+                        <a:buNone/>
+                      </a:pPr>
+                      <a:r>
+                        <a:rPr lang="en-US" sz="900" dirty="0">
+                          <a:solidFill>
+                            <a:srgbClr val="000000"/>
+                          </a:solidFill>
+                          <a:latin typeface="Arial" pitchFamily="34" charset="0"/>
+                          <a:ea typeface="Arial" pitchFamily="34" charset="-122"/>
+                          <a:cs typeface="Arial" pitchFamily="34" charset="-120"/>
+                        </a:rPr>
+                        <a:t>코팅액 과도포 기준 대비 5mm 유격 적용 예정</a:t>
+                      </a:r>
+                      <a:endParaRPr lang="en-US" sz="900" dirty="0">
+                        <a:latin typeface="Arial" charset="0"/>
+                        <a:ea typeface="Arial" charset="0"/>
+                        <a:cs typeface="Arial" charset="0"/>
+                      </a:endParaRPr>
+                    </a:p>
+                  </a:txBody>
+                  <a:tcPr marL="73152" marR="73152" marT="45720" marB="45720" anchor="ctr">
+                    <a:lnL w="9525" cap="flat" cmpd="sng" algn="ctr">
+                      <a:solidFill>
+                        <a:srgbClr val="000000"/>
+                      </a:solidFill>
+                      <a:prstDash val="solid"/>
+                      <a:round/>
+                      <a:headEnd type="none" w="med" len="med"/>
+                      <a:tailEnd type="none" w="med" len="med"/>
+                    </a:lnL>
+                    <a:lnR w="9525" cap="flat" cmpd="sng" algn="ctr">
+                      <a:solidFill>
+                        <a:srgbClr val="000000"/>
+                      </a:solidFill>
+                      <a:prstDash val="solid"/>
+                      <a:round/>
+                      <a:headEnd type="none" w="med" len="med"/>
+                      <a:tailEnd type="none" w="med" len="med"/>
+                    </a:lnR>
+                    <a:lnT w="9525" cap="flat" cmpd="sng" algn="ctr">
+                      <a:solidFill>
+                        <a:srgbClr val="000000"/>
+                      </a:solidFill>
+                      <a:prstDash val="solid"/>
+                      <a:round/>
+                      <a:headEnd type="none" w="med" len="med"/>
+                      <a:tailEnd type="none" w="med" len="med"/>
+                    </a:lnT>
+                    <a:lnB w="9525" cap="flat" cmpd="sng" algn="ctr">
+                      <a:solidFill>
+                        <a:srgbClr val="000000"/>
+                      </a:solidFill>
+                      <a:prstDash val="solid"/>
+                      <a:round/>
+                      <a:headEnd type="none" w="med" len="med"/>
+                      <a:tailEnd type="none" w="med" len="med"/>
+                    </a:lnB>
+                    <a:solidFill>
+                      <a:srgbClr val="FFFFFF"/>
+                    </a:solidFill>
+                  </a:tcPr>
+                </a:tc>
+                <a:tc>
+                  <a:txBody>
+                    <a:bodyPr/>
+                    <a:lstStyle/>
+                    <a:p>
+                      <a:pPr algn="ctr" indent="0" marL="0">
+                        <a:buNone/>
+                      </a:pPr>
+                      <a:r>
+                        <a:rPr lang="en-US" sz="900" dirty="0">
+                          <a:solidFill>
+                            <a:srgbClr val="000000"/>
+                          </a:solidFill>
+                          <a:latin typeface="Arial" pitchFamily="34" charset="0"/>
+                          <a:ea typeface="Arial" pitchFamily="34" charset="-122"/>
+                          <a:cs typeface="Arial" pitchFamily="34" charset="-120"/>
+                        </a:rPr>
+                        <a:t>7/23</a:t>
+                      </a:r>
+                      <a:endParaRPr lang="en-US" sz="900" dirty="0">
+                        <a:latin typeface="Arial" charset="0"/>
+                        <a:ea typeface="Arial" charset="0"/>
+                        <a:cs typeface="Arial" charset="0"/>
+                      </a:endParaRPr>
+                    </a:p>
+                  </a:txBody>
+                  <a:tcPr marL="73152" marR="73152" marT="45720" marB="45720" anchor="ctr">
+                    <a:lnL w="9525" cap="flat" cmpd="sng" algn="ctr">
+                      <a:solidFill>
+                        <a:srgbClr val="000000"/>
+                      </a:solidFill>
+                      <a:prstDash val="solid"/>
+                      <a:round/>
+                      <a:headEnd type="none" w="med" len="med"/>
+                      <a:tailEnd type="none" w="med" len="med"/>
+                    </a:lnL>
+                    <a:lnR w="9525" cap="flat" cmpd="sng" algn="ctr">
+                      <a:solidFill>
+                        <a:srgbClr val="000000"/>
+                      </a:solidFill>
+                      <a:prstDash val="solid"/>
+                      <a:round/>
+                      <a:headEnd type="none" w="med" len="med"/>
+                      <a:tailEnd type="none" w="med" len="med"/>
+                    </a:lnR>
+                    <a:lnT w="9525" cap="flat" cmpd="sng" algn="ctr">
+                      <a:solidFill>
+                        <a:srgbClr val="000000"/>
+                      </a:solidFill>
+                      <a:prstDash val="solid"/>
+                      <a:round/>
+                      <a:headEnd type="none" w="med" len="med"/>
+                      <a:tailEnd type="none" w="med" len="med"/>
+                    </a:lnT>
+                    <a:lnB w="9525" cap="flat" cmpd="sng" algn="ctr">
+                      <a:solidFill>
+                        <a:srgbClr val="000000"/>
+                      </a:solidFill>
+                      <a:prstDash val="solid"/>
+                      <a:round/>
+                      <a:headEnd type="none" w="med" len="med"/>
+                      <a:tailEnd type="none" w="med" len="med"/>
+                    </a:lnB>
+                    <a:solidFill>
+                      <a:srgbClr val="FFFFFF"/>
+                    </a:solidFill>
+                  </a:tcPr>
+                </a:tc>
+              </a:tr>
+              <a:tr h="777240">
+                <a:tc>
+                  <a:txBody>
+                    <a:bodyPr/>
+                    <a:lstStyle/>
+                    <a:p>
+                      <a:pPr algn="ctr" indent="0" marL="0">
+                        <a:buNone/>
+                      </a:pPr>
+                      <a:r>
+                        <a:rPr lang="en-US" sz="900" dirty="0">
+                          <a:solidFill>
+                            <a:srgbClr val="000000"/>
+                          </a:solidFill>
+                          <a:latin typeface="Arial" pitchFamily="34" charset="0"/>
+                          <a:ea typeface="Arial" pitchFamily="34" charset="-122"/>
+                          <a:cs typeface="Arial" pitchFamily="34" charset="-120"/>
+                        </a:rPr>
+                        <a:t>12</a:t>
+                      </a:r>
+                      <a:endParaRPr lang="en-US" sz="900" dirty="0">
+                        <a:latin typeface="Arial" charset="0"/>
+                        <a:ea typeface="Arial" charset="0"/>
+                        <a:cs typeface="Arial" charset="0"/>
+                      </a:endParaRPr>
+                    </a:p>
+                  </a:txBody>
+                  <a:tcPr marL="73152" marR="73152" marT="45720" marB="45720" anchor="ctr">
+                    <a:lnL w="9525" cap="flat" cmpd="sng" algn="ctr">
+                      <a:solidFill>
+                        <a:srgbClr val="000000"/>
+                      </a:solidFill>
+                      <a:prstDash val="solid"/>
+                      <a:round/>
+                      <a:headEnd type="none" w="med" len="med"/>
+                      <a:tailEnd type="none" w="med" len="med"/>
+                    </a:lnL>
+                    <a:lnR w="9525" cap="flat" cmpd="sng" algn="ctr">
+                      <a:solidFill>
+                        <a:srgbClr val="000000"/>
+                      </a:solidFill>
+                      <a:prstDash val="solid"/>
+                      <a:round/>
+                      <a:headEnd type="none" w="med" len="med"/>
+                      <a:tailEnd type="none" w="med" len="med"/>
+                    </a:lnR>
+                    <a:lnT w="9525" cap="flat" cmpd="sng" algn="ctr">
+                      <a:solidFill>
+                        <a:srgbClr val="000000"/>
+                      </a:solidFill>
+                      <a:prstDash val="solid"/>
+                      <a:round/>
+                      <a:headEnd type="none" w="med" len="med"/>
+                      <a:tailEnd type="none" w="med" len="med"/>
+                    </a:lnT>
+                    <a:lnB w="9525" cap="flat" cmpd="sng" algn="ctr">
+                      <a:solidFill>
+                        <a:srgbClr val="000000"/>
+                      </a:solidFill>
+                      <a:prstDash val="solid"/>
+                      <a:round/>
+                      <a:headEnd type="none" w="med" len="med"/>
+                      <a:tailEnd type="none" w="med" len="med"/>
+                    </a:lnB>
+                    <a:solidFill>
+                      <a:srgbClr val="FFFFFF"/>
+                    </a:solidFill>
+                  </a:tcPr>
+                </a:tc>
+                <a:tc>
+                  <a:txBody>
+                    <a:bodyPr/>
+                    <a:lstStyle/>
+                    <a:p>
+                      <a:pPr algn="l" indent="0" marL="0">
+                        <a:buNone/>
+                      </a:pPr>
+                      <a:r>
+                        <a:rPr lang="en-US" sz="900" dirty="0">
+                          <a:solidFill>
+                            <a:srgbClr val="000000"/>
+                          </a:solidFill>
+                          <a:latin typeface="Arial" pitchFamily="34" charset="0"/>
+                          <a:ea typeface="Arial" pitchFamily="34" charset="-122"/>
+                          <a:cs typeface="Arial" pitchFamily="34" charset="-120"/>
+                        </a:rPr>
+                        <a:t>EOL NTC 온도저항 → 온도 환산 후 표기 필요</a:t>
+                      </a:r>
+                      <a:endParaRPr lang="en-US" sz="900" dirty="0">
+                        <a:latin typeface="Arial" charset="0"/>
+                        <a:ea typeface="Arial" charset="0"/>
+                        <a:cs typeface="Arial" charset="0"/>
+                      </a:endParaRPr>
+                    </a:p>
+                  </a:txBody>
+                  <a:tcPr marL="73152" marR="73152" marT="45720" marB="45720" anchor="ctr">
+                    <a:lnL w="9525" cap="flat" cmpd="sng" algn="ctr">
+                      <a:solidFill>
+                        <a:srgbClr val="000000"/>
+                      </a:solidFill>
+                      <a:prstDash val="solid"/>
+                      <a:round/>
+                      <a:headEnd type="none" w="med" len="med"/>
+                      <a:tailEnd type="none" w="med" len="med"/>
+                    </a:lnL>
+                    <a:lnR w="9525" cap="flat" cmpd="sng" algn="ctr">
+                      <a:solidFill>
+                        <a:srgbClr val="000000"/>
+                      </a:solidFill>
+                      <a:prstDash val="solid"/>
+                      <a:round/>
+                      <a:headEnd type="none" w="med" len="med"/>
+                      <a:tailEnd type="none" w="med" len="med"/>
+                    </a:lnR>
+                    <a:lnT w="9525" cap="flat" cmpd="sng" algn="ctr">
+                      <a:solidFill>
+                        <a:srgbClr val="000000"/>
+                      </a:solidFill>
+                      <a:prstDash val="solid"/>
+                      <a:round/>
+                      <a:headEnd type="none" w="med" len="med"/>
+                      <a:tailEnd type="none" w="med" len="med"/>
+                    </a:lnT>
+                    <a:lnB w="9525" cap="flat" cmpd="sng" algn="ctr">
+                      <a:solidFill>
+                        <a:srgbClr val="000000"/>
+                      </a:solidFill>
+                      <a:prstDash val="solid"/>
+                      <a:round/>
+                      <a:headEnd type="none" w="med" len="med"/>
+                      <a:tailEnd type="none" w="med" len="med"/>
+                    </a:lnB>
+                    <a:solidFill>
+                      <a:srgbClr val="FFFFFF"/>
+                    </a:solidFill>
+                  </a:tcPr>
+                </a:tc>
+                <a:tc>
+                  <a:txBody>
+                    <a:bodyPr/>
+                    <a:lstStyle/>
+                    <a:p>
+                      <a:pPr algn="l" indent="0" marL="0">
+                        <a:buNone/>
+                      </a:pPr>
+                      <a:r>
+                        <a:rPr lang="en-US" sz="900" dirty="0">
+                          <a:solidFill>
+                            <a:srgbClr val="000000"/>
+                          </a:solidFill>
+                          <a:latin typeface="Arial" pitchFamily="34" charset="0"/>
+                          <a:ea typeface="Arial" pitchFamily="34" charset="-122"/>
+                          <a:cs typeface="Arial" pitchFamily="34" charset="-120"/>
+                        </a:rPr>
+                        <a:t>EOL NTC 온도저항 값만 표기</a:t>
+                      </a:r>
+                      <a:endParaRPr lang="en-US" sz="900" dirty="0">
+                        <a:latin typeface="Arial" charset="0"/>
+                        <a:ea typeface="Arial" charset="0"/>
+                        <a:cs typeface="Arial" charset="0"/>
+                      </a:endParaRPr>
+                    </a:p>
+                  </a:txBody>
+                  <a:tcPr marL="73152" marR="73152" marT="45720" marB="45720" anchor="ctr">
+                    <a:lnL w="9525" cap="flat" cmpd="sng" algn="ctr">
+                      <a:solidFill>
+                        <a:srgbClr val="000000"/>
+                      </a:solidFill>
+                      <a:prstDash val="solid"/>
+                      <a:round/>
+                      <a:headEnd type="none" w="med" len="med"/>
+                      <a:tailEnd type="none" w="med" len="med"/>
+                    </a:lnL>
+                    <a:lnR w="9525" cap="flat" cmpd="sng" algn="ctr">
+                      <a:solidFill>
+                        <a:srgbClr val="000000"/>
+                      </a:solidFill>
+                      <a:prstDash val="solid"/>
+                      <a:round/>
+                      <a:headEnd type="none" w="med" len="med"/>
+                      <a:tailEnd type="none" w="med" len="med"/>
+                    </a:lnR>
+                    <a:lnT w="9525" cap="flat" cmpd="sng" algn="ctr">
+                      <a:solidFill>
+                        <a:srgbClr val="000000"/>
+                      </a:solidFill>
+                      <a:prstDash val="solid"/>
+                      <a:round/>
+                      <a:headEnd type="none" w="med" len="med"/>
+                      <a:tailEnd type="none" w="med" len="med"/>
+                    </a:lnT>
+                    <a:lnB w="9525" cap="flat" cmpd="sng" algn="ctr">
+                      <a:solidFill>
+                        <a:srgbClr val="000000"/>
+                      </a:solidFill>
+                      <a:prstDash val="solid"/>
+                      <a:round/>
+                      <a:headEnd type="none" w="med" len="med"/>
+                      <a:tailEnd type="none" w="med" len="med"/>
+                    </a:lnB>
+                    <a:solidFill>
+                      <a:srgbClr val="FFFFFF"/>
+                    </a:solidFill>
+                  </a:tcPr>
+                </a:tc>
+                <a:tc>
+                  <a:txBody>
+                    <a:bodyPr/>
+                    <a:lstStyle/>
+                    <a:p>
+                      <a:pPr algn="l" indent="0" marL="0">
+                        <a:buNone/>
+                      </a:pPr>
+                      <a:r>
+                        <a:rPr lang="en-US" sz="900" dirty="0">
+                          <a:solidFill>
+                            <a:srgbClr val="000000"/>
+                          </a:solidFill>
+                          <a:latin typeface="Arial" pitchFamily="34" charset="0"/>
+                          <a:ea typeface="Arial" pitchFamily="34" charset="-122"/>
+                          <a:cs typeface="Arial" pitchFamily="34" charset="-120"/>
+                        </a:rPr>
+                        <a:t>저항값 → 온도 환산 표기 적용 예정</a:t>
+                      </a:r>
+                      <a:endParaRPr lang="en-US" sz="900" dirty="0">
+                        <a:latin typeface="Arial" charset="0"/>
+                        <a:ea typeface="Arial" charset="0"/>
+                        <a:cs typeface="Arial" charset="0"/>
+                      </a:endParaRPr>
+                    </a:p>
+                  </a:txBody>
+                  <a:tcPr marL="73152" marR="73152" marT="45720" marB="45720" anchor="ctr">
+                    <a:lnL w="9525" cap="flat" cmpd="sng" algn="ctr">
+                      <a:solidFill>
+                        <a:srgbClr val="000000"/>
+                      </a:solidFill>
+                      <a:prstDash val="solid"/>
+                      <a:round/>
+                      <a:headEnd type="none" w="med" len="med"/>
+                      <a:tailEnd type="none" w="med" len="med"/>
+                    </a:lnL>
+                    <a:lnR w="9525" cap="flat" cmpd="sng" algn="ctr">
+                      <a:solidFill>
+                        <a:srgbClr val="000000"/>
+                      </a:solidFill>
+                      <a:prstDash val="solid"/>
+                      <a:round/>
+                      <a:headEnd type="none" w="med" len="med"/>
+                      <a:tailEnd type="none" w="med" len="med"/>
+                    </a:lnR>
+                    <a:lnT w="9525" cap="flat" cmpd="sng" algn="ctr">
+                      <a:solidFill>
+                        <a:srgbClr val="000000"/>
+                      </a:solidFill>
+                      <a:prstDash val="solid"/>
+                      <a:round/>
+                      <a:headEnd type="none" w="med" len="med"/>
+                      <a:tailEnd type="none" w="med" len="med"/>
+                    </a:lnT>
+                    <a:lnB w="9525" cap="flat" cmpd="sng" algn="ctr">
+                      <a:solidFill>
+                        <a:srgbClr val="000000"/>
+                      </a:solidFill>
+                      <a:prstDash val="solid"/>
+                      <a:round/>
+                      <a:headEnd type="none" w="med" len="med"/>
+                      <a:tailEnd type="none" w="med" len="med"/>
+                    </a:lnB>
+                    <a:solidFill>
+                      <a:srgbClr val="FFFFFF"/>
+                    </a:solidFill>
+                  </a:tcPr>
+                </a:tc>
+                <a:tc>
+                  <a:txBody>
+                    <a:bodyPr/>
+                    <a:lstStyle/>
+                    <a:p>
+                      <a:pPr algn="ctr" indent="0" marL="0">
+                        <a:buNone/>
+                      </a:pPr>
+                      <a:r>
+                        <a:rPr lang="en-US" sz="900" dirty="0">
+                          <a:solidFill>
+                            <a:srgbClr val="000000"/>
+                          </a:solidFill>
+                          <a:latin typeface="Arial" pitchFamily="34" charset="0"/>
+                          <a:ea typeface="Arial" pitchFamily="34" charset="-122"/>
+                          <a:cs typeface="Arial" pitchFamily="34" charset="-120"/>
+                        </a:rPr>
+                        <a:t>7/23</a:t>
+                      </a:r>
+                      <a:endParaRPr lang="en-US" sz="900" dirty="0">
+                        <a:latin typeface="Arial" charset="0"/>
+                        <a:ea typeface="Arial" charset="0"/>
+                        <a:cs typeface="Arial" charset="0"/>
+                      </a:endParaRPr>
+                    </a:p>
+                  </a:txBody>
+                  <a:tcPr marL="73152" marR="73152" marT="45720" marB="45720" anchor="ctr">
+                    <a:lnL w="9525" cap="flat" cmpd="sng" algn="ctr">
+                      <a:solidFill>
+                        <a:srgbClr val="000000"/>
+                      </a:solidFill>
+                      <a:prstDash val="solid"/>
+                      <a:round/>
+                      <a:headEnd type="none" w="med" len="med"/>
+                      <a:tailEnd type="none" w="med" len="med"/>
+                    </a:lnL>
+                    <a:lnR w="9525" cap="flat" cmpd="sng" algn="ctr">
+                      <a:solidFill>
+                        <a:srgbClr val="000000"/>
+                      </a:solidFill>
+                      <a:prstDash val="solid"/>
+                      <a:round/>
+                      <a:headEnd type="none" w="med" len="med"/>
+                      <a:tailEnd type="none" w="med" len="med"/>
+                    </a:lnR>
+                    <a:lnT w="9525" cap="flat" cmpd="sng" algn="ctr">
+                      <a:solidFill>
+                        <a:srgbClr val="000000"/>
+                      </a:solidFill>
+                      <a:prstDash val="solid"/>
+                      <a:round/>
+                      <a:headEnd type="none" w="med" len="med"/>
+                      <a:tailEnd type="none" w="med" len="med"/>
+                    </a:lnT>
+                    <a:lnB w="9525" cap="flat" cmpd="sng" algn="ctr">
+                      <a:solidFill>
+                        <a:srgbClr val="000000"/>
+                      </a:solidFill>
+                      <a:prstDash val="solid"/>
+                      <a:round/>
+                      <a:headEnd type="none" w="med" len="med"/>
+                      <a:tailEnd type="none" w="med" len="med"/>
+                    </a:lnB>
+                    <a:solidFill>
+                      <a:srgbClr val="FFFFFF"/>
+                    </a:solidFill>
+                  </a:tcPr>
+                </a:tc>
+              </a:tr>
+              <a:tr h="914400">
+                <a:tc>
+                  <a:txBody>
+                    <a:bodyPr/>
+                    <a:lstStyle/>
+                    <a:p>
+                      <a:pPr algn="ctr" indent="0" marL="0">
+                        <a:buNone/>
+                      </a:pPr>
+                      <a:r>
+                        <a:rPr lang="en-US" sz="900" dirty="0">
+                          <a:solidFill>
+                            <a:srgbClr val="000000"/>
+                          </a:solidFill>
+                          <a:latin typeface="Arial" pitchFamily="34" charset="0"/>
+                          <a:ea typeface="Arial" pitchFamily="34" charset="-122"/>
+                          <a:cs typeface="Arial" pitchFamily="34" charset="-120"/>
+                        </a:rPr>
+                        <a:t>23</a:t>
+                      </a:r>
+                      <a:endParaRPr lang="en-US" sz="900" dirty="0">
+                        <a:latin typeface="Arial" charset="0"/>
+                        <a:ea typeface="Arial" charset="0"/>
+                        <a:cs typeface="Arial" charset="0"/>
+                      </a:endParaRPr>
+                    </a:p>
+                  </a:txBody>
+                  <a:tcPr marL="73152" marR="73152" marT="45720" marB="45720" anchor="ctr">
+                    <a:lnL w="9525" cap="flat" cmpd="sng" algn="ctr">
+                      <a:solidFill>
+                        <a:srgbClr val="000000"/>
+                      </a:solidFill>
+                      <a:prstDash val="solid"/>
+                      <a:round/>
+                      <a:headEnd type="none" w="med" len="med"/>
+                      <a:tailEnd type="none" w="med" len="med"/>
+                    </a:lnL>
+                    <a:lnR w="9525" cap="flat" cmpd="sng" algn="ctr">
+                      <a:solidFill>
+                        <a:srgbClr val="000000"/>
+                      </a:solidFill>
+                      <a:prstDash val="solid"/>
+                      <a:round/>
+                      <a:headEnd type="none" w="med" len="med"/>
+                      <a:tailEnd type="none" w="med" len="med"/>
+                    </a:lnR>
+                    <a:lnT w="9525" cap="flat" cmpd="sng" algn="ctr">
+                      <a:solidFill>
+                        <a:srgbClr val="000000"/>
+                      </a:solidFill>
+                      <a:prstDash val="solid"/>
+                      <a:round/>
+                      <a:headEnd type="none" w="med" len="med"/>
+                      <a:tailEnd type="none" w="med" len="med"/>
+                    </a:lnT>
+                    <a:lnB w="9525" cap="flat" cmpd="sng" algn="ctr">
+                      <a:solidFill>
+                        <a:srgbClr val="000000"/>
+                      </a:solidFill>
+                      <a:prstDash val="solid"/>
+                      <a:round/>
+                      <a:headEnd type="none" w="med" len="med"/>
+                      <a:tailEnd type="none" w="med" len="med"/>
+                    </a:lnB>
+                    <a:solidFill>
+                      <a:srgbClr val="FFFFFF"/>
+                    </a:solidFill>
+                  </a:tcPr>
+                </a:tc>
+                <a:tc>
+                  <a:txBody>
+                    <a:bodyPr/>
+                    <a:lstStyle/>
+                    <a:p>
+                      <a:pPr algn="l" indent="0" marL="0">
+                        <a:buNone/>
+                      </a:pPr>
+                      <a:r>
+                        <a:rPr lang="en-US" sz="900" dirty="0">
+                          <a:solidFill>
+                            <a:srgbClr val="000000"/>
+                          </a:solidFill>
+                          <a:latin typeface="Arial" pitchFamily="34" charset="0"/>
+                          <a:ea typeface="Arial" pitchFamily="34" charset="-122"/>
+                          <a:cs typeface="Arial" pitchFamily="34" charset="-120"/>
+                        </a:rPr>
+                        <a:t>온도센서 별물 조립 후 EOL 검사 진행 필요</a:t>
+                      </a:r>
+                      <a:endParaRPr lang="en-US" sz="900" dirty="0">
+                        <a:latin typeface="Arial" charset="0"/>
+                        <a:ea typeface="Arial" charset="0"/>
+                        <a:cs typeface="Arial" charset="0"/>
+                      </a:endParaRPr>
+                    </a:p>
+                  </a:txBody>
+                  <a:tcPr marL="73152" marR="73152" marT="45720" marB="45720" anchor="ctr">
+                    <a:lnL w="9525" cap="flat" cmpd="sng" algn="ctr">
+                      <a:solidFill>
+                        <a:srgbClr val="000000"/>
+                      </a:solidFill>
+                      <a:prstDash val="solid"/>
+                      <a:round/>
+                      <a:headEnd type="none" w="med" len="med"/>
+                      <a:tailEnd type="none" w="med" len="med"/>
+                    </a:lnL>
+                    <a:lnR w="9525" cap="flat" cmpd="sng" algn="ctr">
+                      <a:solidFill>
+                        <a:srgbClr val="000000"/>
+                      </a:solidFill>
+                      <a:prstDash val="solid"/>
+                      <a:round/>
+                      <a:headEnd type="none" w="med" len="med"/>
+                      <a:tailEnd type="none" w="med" len="med"/>
+                    </a:lnR>
+                    <a:lnT w="9525" cap="flat" cmpd="sng" algn="ctr">
+                      <a:solidFill>
+                        <a:srgbClr val="000000"/>
+                      </a:solidFill>
+                      <a:prstDash val="solid"/>
+                      <a:round/>
+                      <a:headEnd type="none" w="med" len="med"/>
+                      <a:tailEnd type="none" w="med" len="med"/>
+                    </a:lnT>
+                    <a:lnB w="9525" cap="flat" cmpd="sng" algn="ctr">
+                      <a:solidFill>
+                        <a:srgbClr val="000000"/>
+                      </a:solidFill>
+                      <a:prstDash val="solid"/>
+                      <a:round/>
+                      <a:headEnd type="none" w="med" len="med"/>
+                      <a:tailEnd type="none" w="med" len="med"/>
+                    </a:lnB>
+                    <a:solidFill>
+                      <a:srgbClr val="FFFFFF"/>
+                    </a:solidFill>
+                  </a:tcPr>
+                </a:tc>
+                <a:tc>
+                  <a:txBody>
+                    <a:bodyPr/>
+                    <a:lstStyle/>
+                    <a:p>
+                      <a:pPr algn="l" indent="0" marL="0">
+                        <a:buNone/>
+                      </a:pPr>
+                      <a:r>
+                        <a:rPr lang="en-US" sz="900" dirty="0">
+                          <a:solidFill>
+                            <a:srgbClr val="000000"/>
+                          </a:solidFill>
+                          <a:latin typeface="Arial" pitchFamily="34" charset="0"/>
+                          <a:ea typeface="Arial" pitchFamily="34" charset="-122"/>
+                          <a:cs typeface="Arial" pitchFamily="34" charset="-120"/>
+                        </a:rPr>
+                        <a:t>EOL 후 별물조립 중 취급성으로 인한 NTC 손상 risk 큼</a:t>
+                      </a:r>
+                      <a:endParaRPr lang="en-US" sz="900" dirty="0">
+                        <a:latin typeface="Arial" charset="0"/>
+                        <a:ea typeface="Arial" charset="0"/>
+                        <a:cs typeface="Arial" charset="0"/>
+                      </a:endParaRPr>
+                    </a:p>
+                  </a:txBody>
+                  <a:tcPr marL="73152" marR="73152" marT="45720" marB="45720" anchor="ctr">
+                    <a:lnL w="9525" cap="flat" cmpd="sng" algn="ctr">
+                      <a:solidFill>
+                        <a:srgbClr val="000000"/>
+                      </a:solidFill>
+                      <a:prstDash val="solid"/>
+                      <a:round/>
+                      <a:headEnd type="none" w="med" len="med"/>
+                      <a:tailEnd type="none" w="med" len="med"/>
+                    </a:lnL>
+                    <a:lnR w="9525" cap="flat" cmpd="sng" algn="ctr">
+                      <a:solidFill>
+                        <a:srgbClr val="000000"/>
+                      </a:solidFill>
+                      <a:prstDash val="solid"/>
+                      <a:round/>
+                      <a:headEnd type="none" w="med" len="med"/>
+                      <a:tailEnd type="none" w="med" len="med"/>
+                    </a:lnR>
+                    <a:lnT w="9525" cap="flat" cmpd="sng" algn="ctr">
+                      <a:solidFill>
+                        <a:srgbClr val="000000"/>
+                      </a:solidFill>
+                      <a:prstDash val="solid"/>
+                      <a:round/>
+                      <a:headEnd type="none" w="med" len="med"/>
+                      <a:tailEnd type="none" w="med" len="med"/>
+                    </a:lnT>
+                    <a:lnB w="9525" cap="flat" cmpd="sng" algn="ctr">
+                      <a:solidFill>
+                        <a:srgbClr val="000000"/>
+                      </a:solidFill>
+                      <a:prstDash val="solid"/>
+                      <a:round/>
+                      <a:headEnd type="none" w="med" len="med"/>
+                      <a:tailEnd type="none" w="med" len="med"/>
+                    </a:lnB>
+                    <a:solidFill>
+                      <a:srgbClr val="FFFFFF"/>
+                    </a:solidFill>
+                  </a:tcPr>
+                </a:tc>
+                <a:tc>
+                  <a:txBody>
+                    <a:bodyPr/>
+                    <a:lstStyle/>
+                    <a:p>
+                      <a:pPr algn="l" indent="0" marL="0">
+                        <a:buNone/>
+                      </a:pPr>
+                      <a:r>
+                        <a:rPr lang="en-US" sz="900" dirty="0">
+                          <a:solidFill>
+                            <a:srgbClr val="000000"/>
+                          </a:solidFill>
+                          <a:latin typeface="Arial" pitchFamily="34" charset="0"/>
+                          <a:ea typeface="Arial" pitchFamily="34" charset="-122"/>
+                          <a:cs typeface="Arial" pitchFamily="34" charset="-120"/>
+                        </a:rPr>
+                        <a:t>온도센서 별물 조립 후 EOL 검사 진행 가능하도록 설비 및 JIG 수정, Set-Up 진행 중</a:t>
+                      </a:r>
+                      <a:endParaRPr lang="en-US" sz="900" dirty="0">
+                        <a:latin typeface="Arial" charset="0"/>
+                        <a:ea typeface="Arial" charset="0"/>
+                        <a:cs typeface="Arial" charset="0"/>
+                      </a:endParaRPr>
+                    </a:p>
+                  </a:txBody>
+                  <a:tcPr marL="73152" marR="73152" marT="45720" marB="45720" anchor="ctr">
+                    <a:lnL w="9525" cap="flat" cmpd="sng" algn="ctr">
+                      <a:solidFill>
+                        <a:srgbClr val="000000"/>
+                      </a:solidFill>
+                      <a:prstDash val="solid"/>
+                      <a:round/>
+                      <a:headEnd type="none" w="med" len="med"/>
+                      <a:tailEnd type="none" w="med" len="med"/>
+                    </a:lnL>
+                    <a:lnR w="9525" cap="flat" cmpd="sng" algn="ctr">
+                      <a:solidFill>
+                        <a:srgbClr val="000000"/>
+                      </a:solidFill>
+                      <a:prstDash val="solid"/>
+                      <a:round/>
+                      <a:headEnd type="none" w="med" len="med"/>
+                      <a:tailEnd type="none" w="med" len="med"/>
+                    </a:lnR>
+                    <a:lnT w="9525" cap="flat" cmpd="sng" algn="ctr">
+                      <a:solidFill>
+                        <a:srgbClr val="000000"/>
+                      </a:solidFill>
+                      <a:prstDash val="solid"/>
+                      <a:round/>
+                      <a:headEnd type="none" w="med" len="med"/>
+                      <a:tailEnd type="none" w="med" len="med"/>
+                    </a:lnT>
+                    <a:lnB w="9525" cap="flat" cmpd="sng" algn="ctr">
+                      <a:solidFill>
+                        <a:srgbClr val="000000"/>
+                      </a:solidFill>
+                      <a:prstDash val="solid"/>
+                      <a:round/>
+                      <a:headEnd type="none" w="med" len="med"/>
+                      <a:tailEnd type="none" w="med" len="med"/>
+                    </a:lnB>
+                    <a:solidFill>
+                      <a:srgbClr val="FFFFFF"/>
+                    </a:solidFill>
+                  </a:tcPr>
+                </a:tc>
+                <a:tc>
+                  <a:txBody>
+                    <a:bodyPr/>
+                    <a:lstStyle/>
+                    <a:p>
+                      <a:pPr algn="ctr" indent="0" marL="0">
+                        <a:buNone/>
+                      </a:pPr>
+                      <a:r>
+                        <a:rPr lang="en-US" sz="900" dirty="0">
+                          <a:solidFill>
+                            <a:srgbClr val="000000"/>
+                          </a:solidFill>
+                          <a:latin typeface="Arial" pitchFamily="34" charset="0"/>
+                          <a:ea typeface="Arial" pitchFamily="34" charset="-122"/>
+                          <a:cs typeface="Arial" pitchFamily="34" charset="-120"/>
+                        </a:rPr>
+                        <a:t>7/23</a:t>
+                      </a:r>
+                      <a:endParaRPr lang="en-US" sz="900" dirty="0">
+                        <a:latin typeface="Arial" charset="0"/>
+                        <a:ea typeface="Arial" charset="0"/>
+                        <a:cs typeface="Arial" charset="0"/>
+                      </a:endParaRPr>
+                    </a:p>
+                  </a:txBody>
+                  <a:tcPr marL="73152" marR="73152" marT="45720" marB="45720" anchor="ctr">
+                    <a:lnL w="9525" cap="flat" cmpd="sng" algn="ctr">
+                      <a:solidFill>
+                        <a:srgbClr val="000000"/>
+                      </a:solidFill>
+                      <a:prstDash val="solid"/>
+                      <a:round/>
+                      <a:headEnd type="none" w="med" len="med"/>
+                      <a:tailEnd type="none" w="med" len="med"/>
+                    </a:lnL>
+                    <a:lnR w="9525" cap="flat" cmpd="sng" algn="ctr">
+                      <a:solidFill>
+                        <a:srgbClr val="000000"/>
+                      </a:solidFill>
+                      <a:prstDash val="solid"/>
+                      <a:round/>
+                      <a:headEnd type="none" w="med" len="med"/>
+                      <a:tailEnd type="none" w="med" len="med"/>
+                    </a:lnR>
+                    <a:lnT w="9525" cap="flat" cmpd="sng" algn="ctr">
+                      <a:solidFill>
+                        <a:srgbClr val="000000"/>
+                      </a:solidFill>
+                      <a:prstDash val="solid"/>
+                      <a:round/>
+                      <a:headEnd type="none" w="med" len="med"/>
+                      <a:tailEnd type="none" w="med" len="med"/>
+                    </a:lnT>
+                    <a:lnB w="9525" cap="flat" cmpd="sng" algn="ctr">
+                      <a:solidFill>
+                        <a:srgbClr val="000000"/>
+                      </a:solidFill>
+                      <a:prstDash val="solid"/>
+                      <a:round/>
+                      <a:headEnd type="none" w="med" len="med"/>
+                      <a:tailEnd type="none" w="med" len="med"/>
+                    </a:lnB>
+                    <a:solidFill>
+                      <a:srgbClr val="FFFFFF"/>
+                    </a:solidFill>
+                  </a:tcPr>
+                </a:tc>
+              </a:tr>
+            </a:tbl>
+          </a:graphicData>
+        </a:graphic>
+      </p:graphicFrame>
+      <p:sp>
+        <p:nvSpPr>
+          <p:cNvPr id="4" name="Text 1"/>
+          <p:cNvSpPr/>
+          <p:nvPr/>
+        </p:nvSpPr>
+        <p:spPr>
+          <a:xfrm>
+            <a:off x="365760" y="5806440"/>
+            <a:ext cx="8412480" cy="274320"/>
+          </a:xfrm>
+          <a:prstGeom prst="rect">
+            <a:avLst/>
+          </a:prstGeom>
+          <a:noFill/>
+          <a:ln/>
+        </p:spPr>
+        <p:txBody>
+          <a:bodyPr wrap="square" lIns="0" tIns="0" rIns="0" bIns="0" rtlCol="0" anchor="ctr"/>
+          <a:lstStyle/>
+          <a:p>
+            <a:pPr algn="l" indent="0" marL="0">
+              <a:buNone/>
+            </a:pPr>
+            <a:r>
+              <a:rPr lang="en-US" sz="900" dirty="0">
+                <a:solidFill>
+                  <a:srgbClr val="595959"/>
+                </a:solidFill>
+                <a:latin typeface="Arial" pitchFamily="34" charset="0"/>
+                <a:ea typeface="Arial" pitchFamily="34" charset="-122"/>
+                <a:cs typeface="Arial" pitchFamily="34" charset="-120"/>
+              </a:rPr>
+              <a:t>※ 제기: 세방리튬배터리 품질관리팀 (구현서 책임)  /  조치: 글로우원 개발팀 (장현순 매니저)</a:t>
+            </a:r>
+            <a:endParaRPr lang="en-US" sz="900" dirty="0"/>
+          </a:p>
+        </p:txBody>
+      </p:sp>
+      <p:sp>
+        <p:nvSpPr>
+          <p:cNvPr id="5" name="Shape 2"/>
+          <p:cNvSpPr/>
+          <p:nvPr/>
+        </p:nvSpPr>
+        <p:spPr>
+          <a:xfrm>
+            <a:off x="228600" y="6473952"/>
+            <a:ext cx="8686800" cy="0"/>
+          </a:xfrm>
+          <a:prstGeom prst="line">
+            <a:avLst/>
+          </a:prstGeom>
+          <a:noFill/>
+          <a:ln w="19050">
+            <a:solidFill>
+              <a:srgbClr val="00A651"/>
+            </a:solidFill>
+            <a:prstDash val="solid"/>
+          </a:ln>
+        </p:spPr>
+      </p:sp>
+      <p:sp>
+        <p:nvSpPr>
+          <p:cNvPr id="6" name="Text 3"/>
+          <p:cNvSpPr/>
+          <p:nvPr/>
+        </p:nvSpPr>
+        <p:spPr>
+          <a:xfrm>
+            <a:off x="228600" y="6510528"/>
+            <a:ext cx="4206240" cy="228600"/>
+          </a:xfrm>
+          <a:prstGeom prst="rect">
+            <a:avLst/>
+          </a:prstGeom>
+          <a:noFill/>
+          <a:ln/>
+        </p:spPr>
+        <p:txBody>
+          <a:bodyPr wrap="square" lIns="0" tIns="0" rIns="0" bIns="0" rtlCol="0" anchor="ctr"/>
+          <a:lstStyle/>
+          <a:p>
+            <a:pPr algn="l" indent="0" marL="0">
+              <a:buNone/>
+            </a:pPr>
+            <a:r>
+              <a:rPr lang="en-US" sz="750" i="1" dirty="0">
+                <a:solidFill>
+                  <a:srgbClr val="00A651"/>
+                </a:solidFill>
+                <a:latin typeface="Arial" pitchFamily="34" charset="0"/>
+                <a:ea typeface="Arial" pitchFamily="34" charset="-122"/>
+                <a:cs typeface="Arial" pitchFamily="34" charset="-120"/>
+              </a:rPr>
+              <a:t>Creative Solution Company with Advanced Technology</a:t>
+            </a:r>
+            <a:endParaRPr lang="en-US" sz="750" dirty="0"/>
+          </a:p>
+        </p:txBody>
+      </p:sp>
+      <p:sp>
+        <p:nvSpPr>
+          <p:cNvPr id="7" name="Text 4"/>
+          <p:cNvSpPr/>
+          <p:nvPr/>
+        </p:nvSpPr>
+        <p:spPr>
+          <a:xfrm>
+            <a:off x="7635240" y="6419088"/>
+            <a:ext cx="1247242" cy="351495"/>
+          </a:xfrm>
+          <a:prstGeom prst="rect">
+            <a:avLst/>
+          </a:prstGeom>
+          <a:noFill/>
+          <a:ln/>
+        </p:spPr>
+        <p:txBody>
+          <a:bodyPr wrap="square" lIns="0" tIns="0" rIns="0" bIns="0" rtlCol="0" anchor="ctr"/>
+          <a:lstStyle/>
+          <a:p>
+            <a:pPr indent="0" marL="0">
+              <a:lnSpc>
+                <a:spcPct val="90000"/>
+              </a:lnSpc>
+              <a:buNone/>
+            </a:pPr>
+            <a:r>
+              <a:rPr lang="en-US" sz="434" i="1" dirty="0">
+                <a:solidFill>
+                  <a:srgbClr val="1F4E79"/>
+                </a:solidFill>
+                <a:latin typeface="Arial" pitchFamily="34" charset="0"/>
+                <a:ea typeface="Arial" pitchFamily="34" charset="-122"/>
+                <a:cs typeface="Arial" pitchFamily="34" charset="-120"/>
+              </a:rPr>
+              <a:t>songhyun</a:t>
+            </a:r>
+            <a:endParaRPr lang="en-US" sz="434" dirty="0"/>
+          </a:p>
+          <a:p>
+            <a:pPr indent="0" marL="0">
+              <a:lnSpc>
+                <a:spcPct val="90000"/>
+              </a:lnSpc>
+              <a:buNone/>
+            </a:pPr>
+            <a:r>
+              <a:rPr lang="en-US" sz="992" b="1" i="1" dirty="0">
+                <a:solidFill>
+                  <a:srgbClr val="00A651"/>
+                </a:solidFill>
+                <a:latin typeface="Arial" pitchFamily="34" charset="0"/>
+                <a:ea typeface="Arial" pitchFamily="34" charset="-122"/>
+                <a:cs typeface="Arial" pitchFamily="34" charset="-120"/>
+              </a:rPr>
+              <a:t>GlowOne</a:t>
+            </a:r>
+            <a:pPr indent="0" marL="0">
+              <a:lnSpc>
+                <a:spcPct val="90000"/>
+              </a:lnSpc>
+              <a:buNone/>
+            </a:pPr>
+            <a:r>
+              <a:rPr lang="en-US" sz="806" b="1" dirty="0">
+                <a:solidFill>
+                  <a:srgbClr val="E8420B"/>
+                </a:solidFill>
+                <a:latin typeface="Arial" pitchFamily="34" charset="0"/>
+                <a:ea typeface="Arial" pitchFamily="34" charset="-122"/>
+                <a:cs typeface="Arial" pitchFamily="34" charset="-120"/>
+              </a:rPr>
+              <a:t> ”</a:t>
+            </a:r>
+            <a:endParaRPr lang="en-US" sz="434" dirty="0"/>
+          </a:p>
+        </p:txBody>
+      </p:sp>
+      <p:sp>
+        <p:nvSpPr>
+          <p:cNvPr id="8" name="Text 5"/>
+          <p:cNvSpPr/>
+          <p:nvPr/>
+        </p:nvSpPr>
+        <p:spPr>
+          <a:xfrm>
+            <a:off x="4206240" y="6510528"/>
+            <a:ext cx="731520" cy="228600"/>
+          </a:xfrm>
+          <a:prstGeom prst="rect">
+            <a:avLst/>
+          </a:prstGeom>
+          <a:noFill/>
+          <a:ln/>
+        </p:spPr>
+        <p:txBody>
+          <a:bodyPr wrap="square" lIns="0" tIns="0" rIns="0" bIns="0" rtlCol="0" anchor="ctr"/>
+          <a:lstStyle/>
+          <a:p>
+            <a:pPr algn="ctr" indent="0" marL="0">
+              <a:buNone/>
+            </a:pPr>
+            <a:r>
+              <a:rPr lang="en-US" sz="900" dirty="0">
+                <a:solidFill>
+                  <a:srgbClr val="404040"/>
+                </a:solidFill>
+                <a:latin typeface="Arial" pitchFamily="34" charset="0"/>
+                <a:ea typeface="Arial" pitchFamily="34" charset="-122"/>
+                <a:cs typeface="Arial" pitchFamily="34" charset="-120"/>
+              </a:rPr>
+              <a:t>4</a:t>
+            </a:r>
+            <a:endParaRPr lang="en-US" sz="900" dirty="0"/>
+          </a:p>
+        </p:txBody>
+      </p:sp>
+    </p:spTree>
+  </p:cSld>
+  <p:clrMapOvr>
+    <a:masterClrMapping/>
+  </p:clrMapOvr>
+</p:sld>
+</file>
+
+<file path=ppt/slides/slide6.xml><?xml version="1.0" encoding="utf-8"?>
+<p:sld xmlns:a="http://schemas.openxmlformats.org/drawingml/2006/main" xmlns:r="http://schemas.openxmlformats.org/officeDocument/2006/relationships" xmlns:p="http://schemas.openxmlformats.org/presentationml/2006/main">
+  <p:cSld name="Slide 6">
+    <p:spTree>
+      <p:nvGrpSpPr>
+        <p:cNvPr id="1" name=""/>
+        <p:cNvGrpSpPr/>
+        <p:nvPr/>
+      </p:nvGrpSpPr>
+      <p:grpSpPr>
+        <a:xfrm>
+          <a:off x="0" y="0"/>
+          <a:ext cx="0" cy="0"/>
+          <a:chOff x="0" y="0"/>
+          <a:chExt cx="0" cy="0"/>
+        </a:xfrm>
+      </p:grpSpPr>
+      <p:sp>
+        <p:nvSpPr>
+          <p:cNvPr id="2" name="Text 0"/>
+          <p:cNvSpPr/>
+          <p:nvPr/>
+        </p:nvSpPr>
+        <p:spPr>
+          <a:xfrm>
+            <a:off x="320040" y="274320"/>
+            <a:ext cx="8503920" cy="384048"/>
+          </a:xfrm>
+          <a:prstGeom prst="rect">
+            <a:avLst/>
+          </a:prstGeom>
+          <a:noFill/>
+          <a:ln/>
+        </p:spPr>
+        <p:txBody>
+          <a:bodyPr wrap="square" lIns="0" tIns="0" rIns="0" bIns="0" rtlCol="0" anchor="ctr"/>
+          <a:lstStyle/>
+          <a:p>
+            <a:pPr algn="l" indent="0" marL="0">
+              <a:buNone/>
+            </a:pPr>
+            <a:r>
+              <a:rPr lang="en-US" sz="1200" b="1" dirty="0">
+                <a:solidFill>
+                  <a:srgbClr val="000000"/>
+                </a:solidFill>
+                <a:latin typeface="Arial" pitchFamily="34" charset="0"/>
+                <a:ea typeface="Arial" pitchFamily="34" charset="-122"/>
+                <a:cs typeface="Arial" pitchFamily="34" charset="-120"/>
+              </a:rPr>
+              <a:t>● </a:t>
+            </a:r>
+            <a:pPr algn="l" indent="0" marL="0">
+              <a:buNone/>
+            </a:pPr>
+            <a:r>
+              <a:rPr lang="en-US" sz="1600" b="1" dirty="0">
+                <a:solidFill>
+                  <a:srgbClr val="000000"/>
+                </a:solidFill>
+                <a:latin typeface="Arial" pitchFamily="34" charset="0"/>
+                <a:ea typeface="Arial" pitchFamily="34" charset="-122"/>
+                <a:cs typeface="Arial" pitchFamily="34" charset="-120"/>
+              </a:rPr>
               <a:t>BJ EV INLINE(자동화 검사 라인) UPH.</a:t>
             </a:r>
             <a:endParaRPr lang="en-US" sz="1200" dirty="0"/>
@@ -5579,7 +8050,7 @@
       </p:sp>
       <p:graphicFrame>
         <p:nvGraphicFramePr>
-          <p:cNvPr id="6" name="Table 0"/>
+          <p:cNvPr id="7" name="Table 0"/>
           <p:cNvGraphicFramePr>
             <a:graphicFrameLocks noGrp="1"/>
           </p:cNvGraphicFramePr>
@@ -8478,7 +10949,7 @@
                 <a:ea typeface="Arial" pitchFamily="34" charset="-122"/>
                 <a:cs typeface="Arial" pitchFamily="34" charset="-120"/>
               </a:rPr>
-              <a:t>4</a:t>
+              <a:t>5</a:t>
             </a:r>
             <a:endParaRPr lang="en-US" sz="900" dirty="0"/>
           </a:p>

--- a/docs/BJ검사기-Set-Up-완료보고서.pptx
+++ b/docs/BJ검사기-Set-Up-완료보고서.pptx
@@ -6220,7 +6220,7 @@
                           <a:ea typeface="Arial" pitchFamily="34" charset="-122"/>
                           <a:cs typeface="Arial" pitchFamily="34" charset="-120"/>
                         </a:rPr>
-                        <a:t>간섭 구간 기구물 수정 예정</a:t>
+                        <a:t>간섭 구간 기구물 수정 완료 → 캐리어 팝업 동작 시 온도센서 간섭 없음 확인</a:t>
                       </a:r>
                       <a:endParaRPr lang="en-US" sz="900" dirty="0">
                         <a:latin typeface="Arial" charset="0"/>
@@ -6289,6 +6289,27 @@
                           <a:cs typeface="Arial" pitchFamily="34" charset="-120"/>
                         </a:rPr>
                         <a:t>7/23</a:t>
+                      </a:r>
+                      <a:endParaRPr lang="en-US" sz="900" dirty="0">
+                        <a:latin typeface="Arial" charset="0"/>
+                        <a:ea typeface="Arial" charset="0"/>
+                        <a:cs typeface="Arial" charset="0"/>
+                      </a:endParaRPr>
+                    </a:p>
+                    <a:p>
+                      <a:pPr algn="ctr" indent="0" marL="0">
+                        <a:buNone/>
+                      </a:pPr>
+                      <a:r>
+                        <a:rPr lang="en-US" sz="900" dirty="0">
+                          <a:solidFill>
+                            <a:srgbClr val="000000"/>
+                          </a:solidFill>
+                          <a:latin typeface="Arial" pitchFamily="34" charset="0"/>
+                          <a:ea typeface="Arial" pitchFamily="34" charset="-122"/>
+                          <a:cs typeface="Arial" pitchFamily="34" charset="-120"/>
+                        </a:rPr>
+                        <a:t>완료</a:t>
                       </a:r>
                       <a:endParaRPr lang="en-US" sz="900" dirty="0">
                         <a:latin typeface="Arial" charset="0"/>
@@ -6562,7 +6583,7 @@
                           <a:ea typeface="Arial" pitchFamily="34" charset="-122"/>
                           <a:cs typeface="Arial" pitchFamily="34" charset="-120"/>
                         </a:rPr>
-                        <a:t>리더기 위치 조정 또는 재배치 예정</a:t>
+                        <a:t>리더기 위치 조정 완료 → 부품 바코드 리딩 정상 확인</a:t>
                       </a:r>
                       <a:endParaRPr lang="en-US" sz="900" dirty="0">
                         <a:latin typeface="Arial" charset="0"/>
@@ -6631,6 +6652,27 @@
                           <a:cs typeface="Arial" pitchFamily="34" charset="-120"/>
                         </a:rPr>
                         <a:t>7/23</a:t>
+                      </a:r>
+                      <a:endParaRPr lang="en-US" sz="900" dirty="0">
+                        <a:latin typeface="Arial" charset="0"/>
+                        <a:ea typeface="Arial" charset="0"/>
+                        <a:cs typeface="Arial" charset="0"/>
+                      </a:endParaRPr>
+                    </a:p>
+                    <a:p>
+                      <a:pPr algn="ctr" indent="0" marL="0">
+                        <a:buNone/>
+                      </a:pPr>
+                      <a:r>
+                        <a:rPr lang="en-US" sz="900" dirty="0">
+                          <a:solidFill>
+                            <a:srgbClr val="000000"/>
+                          </a:solidFill>
+                          <a:latin typeface="Arial" pitchFamily="34" charset="0"/>
+                          <a:ea typeface="Arial" pitchFamily="34" charset="-122"/>
+                          <a:cs typeface="Arial" pitchFamily="34" charset="-120"/>
+                        </a:rPr>
+                        <a:t>완료</a:t>
                       </a:r>
                       <a:endParaRPr lang="en-US" sz="900" dirty="0">
                         <a:latin typeface="Arial" charset="0"/>
@@ -6904,7 +6946,7 @@
                           <a:ea typeface="Arial" pitchFamily="34" charset="-122"/>
                           <a:cs typeface="Arial" pitchFamily="34" charset="-120"/>
                         </a:rPr>
-                        <a:t>코팅액 과도포 기준 대비 5mm 유격 적용 예정</a:t>
+                        <a:t>코팅액 과도포 기준 대비 5mm 유격 적용 완료 → 내전압 검사 시 접착 현상 없음 확인</a:t>
                       </a:r>
                       <a:endParaRPr lang="en-US" sz="900" dirty="0">
                         <a:latin typeface="Arial" charset="0"/>
@@ -6973,6 +7015,27 @@
                           <a:cs typeface="Arial" pitchFamily="34" charset="-120"/>
                         </a:rPr>
                         <a:t>7/23</a:t>
+                      </a:r>
+                      <a:endParaRPr lang="en-US" sz="900" dirty="0">
+                        <a:latin typeface="Arial" charset="0"/>
+                        <a:ea typeface="Arial" charset="0"/>
+                        <a:cs typeface="Arial" charset="0"/>
+                      </a:endParaRPr>
+                    </a:p>
+                    <a:p>
+                      <a:pPr algn="ctr" indent="0" marL="0">
+                        <a:buNone/>
+                      </a:pPr>
+                      <a:r>
+                        <a:rPr lang="en-US" sz="900" dirty="0">
+                          <a:solidFill>
+                            <a:srgbClr val="000000"/>
+                          </a:solidFill>
+                          <a:latin typeface="Arial" pitchFamily="34" charset="0"/>
+                          <a:ea typeface="Arial" pitchFamily="34" charset="-122"/>
+                          <a:cs typeface="Arial" pitchFamily="34" charset="-120"/>
+                        </a:rPr>
+                        <a:t>완료</a:t>
                       </a:r>
                       <a:endParaRPr lang="en-US" sz="900" dirty="0">
                         <a:latin typeface="Arial" charset="0"/>
@@ -7246,7 +7309,7 @@
                           <a:ea typeface="Arial" pitchFamily="34" charset="-122"/>
                           <a:cs typeface="Arial" pitchFamily="34" charset="-120"/>
                         </a:rPr>
-                        <a:t>저항값 → 온도 환산 표기 적용 예정</a:t>
+                        <a:t>저항값 → 온도 환산 표기 적용 완료 (검사 화면 온도값 표기 확인)</a:t>
                       </a:r>
                       <a:endParaRPr lang="en-US" sz="900" dirty="0">
                         <a:latin typeface="Arial" charset="0"/>
@@ -7315,6 +7378,27 @@
                           <a:cs typeface="Arial" pitchFamily="34" charset="-120"/>
                         </a:rPr>
                         <a:t>7/23</a:t>
+                      </a:r>
+                      <a:endParaRPr lang="en-US" sz="900" dirty="0">
+                        <a:latin typeface="Arial" charset="0"/>
+                        <a:ea typeface="Arial" charset="0"/>
+                        <a:cs typeface="Arial" charset="0"/>
+                      </a:endParaRPr>
+                    </a:p>
+                    <a:p>
+                      <a:pPr algn="ctr" indent="0" marL="0">
+                        <a:buNone/>
+                      </a:pPr>
+                      <a:r>
+                        <a:rPr lang="en-US" sz="900" dirty="0">
+                          <a:solidFill>
+                            <a:srgbClr val="000000"/>
+                          </a:solidFill>
+                          <a:latin typeface="Arial" pitchFamily="34" charset="0"/>
+                          <a:ea typeface="Arial" pitchFamily="34" charset="-122"/>
+                          <a:cs typeface="Arial" pitchFamily="34" charset="-120"/>
+                        </a:rPr>
+                        <a:t>완료</a:t>
                       </a:r>
                       <a:endParaRPr lang="en-US" sz="900" dirty="0">
                         <a:latin typeface="Arial" charset="0"/>
@@ -7588,7 +7672,7 @@
                           <a:ea typeface="Arial" pitchFamily="34" charset="-122"/>
                           <a:cs typeface="Arial" pitchFamily="34" charset="-120"/>
                         </a:rPr>
-                        <a:t>온도센서 별물 조립 후 EOL 검사 진행 가능하도록 설비 및 JIG 수정, Set-Up 진행 중</a:t>
+                        <a:t>설비 및 JIG 수정, Set-Up 완료 → 온도센서 별물 조립 후 EOL 검사 진행 가능 확인</a:t>
                       </a:r>
                       <a:endParaRPr lang="en-US" sz="900" dirty="0">
                         <a:latin typeface="Arial" charset="0"/>
@@ -7657,6 +7741,27 @@
                           <a:cs typeface="Arial" pitchFamily="34" charset="-120"/>
                         </a:rPr>
                         <a:t>7/23</a:t>
+                      </a:r>
+                      <a:endParaRPr lang="en-US" sz="900" dirty="0">
+                        <a:latin typeface="Arial" charset="0"/>
+                        <a:ea typeface="Arial" charset="0"/>
+                        <a:cs typeface="Arial" charset="0"/>
+                      </a:endParaRPr>
+                    </a:p>
+                    <a:p>
+                      <a:pPr algn="ctr" indent="0" marL="0">
+                        <a:buNone/>
+                      </a:pPr>
+                      <a:r>
+                        <a:rPr lang="en-US" sz="900" dirty="0">
+                          <a:solidFill>
+                            <a:srgbClr val="000000"/>
+                          </a:solidFill>
+                          <a:latin typeface="Arial" pitchFamily="34" charset="0"/>
+                          <a:ea typeface="Arial" pitchFamily="34" charset="-122"/>
+                          <a:cs typeface="Arial" pitchFamily="34" charset="-120"/>
+                        </a:rPr>
+                        <a:t>완료</a:t>
                       </a:r>
                       <a:endParaRPr lang="en-US" sz="900" dirty="0">
                         <a:latin typeface="Arial" charset="0"/>
